--- a/presentation/v6/Load_Strategy_Full_and_Incremental.pptx
+++ b/presentation/v6/Load_Strategy_Full_and_Incremental.pptx
@@ -4,11 +4,14 @@
   <p:sldMasterIdLst>
     <p:sldMasterId id="2147483648" r:id="rId1"/>
   </p:sldMasterIdLst>
+  <p:notesMasterIdLst>
+    <p:notesMasterId r:id="rId4"/>
+  </p:notesMasterIdLst>
   <p:sldIdLst>
-    <p:sldId id="256" r:id="rId7"/>
-    <p:sldId id="257" r:id="rId9"/>
+    <p:sldId id="256" r:id="rId2"/>
+    <p:sldId id="257" r:id="rId3"/>
   </p:sldIdLst>
-  <p:sldSz cx="12188952" cy="6858000" type="screen4x3"/>
+  <p:sldSz cx="12188825" cy="6858000"/>
   <p:notesSz cx="6858000" cy="9144000"/>
   <p:defaultTextStyle>
     <a:defPPr>
@@ -105,11 +108,27 @@
       </a:defRPr>
     </a:lvl9pPr>
   </p:defaultTextStyle>
+  <p:extLst>
+    <p:ext uri="{EFAFB233-063F-42B5-8137-9DF3F51BA10A}">
+      <p15:sldGuideLst xmlns:p15="http://schemas.microsoft.com/office/powerpoint/2012/main">
+        <p15:guide id="1" orient="horz" pos="2160">
+          <p15:clr>
+            <a:srgbClr val="A4A3A4"/>
+          </p15:clr>
+        </p15:guide>
+        <p15:guide id="2" pos="2880">
+          <p15:clr>
+            <a:srgbClr val="A4A3A4"/>
+          </p15:clr>
+        </p15:guide>
+      </p15:sldGuideLst>
+    </p:ext>
+  </p:extLst>
 </p:presentation>
 </file>
 
 <file path=ppt/notesMasters/notesMaster1.xml><?xml version="1.0" encoding="utf-8"?>
-<p:notesMaster xmlns:a="http://schemas.openxmlformats.org/drawingml/2006/main" xmlns:p="http://schemas.openxmlformats.org/presentationml/2006/main" xmlns:r="http://schemas.openxmlformats.org/officeDocument/2006/relationships">
+<p:notesMaster xmlns:a="http://schemas.openxmlformats.org/drawingml/2006/main" xmlns:r="http://schemas.openxmlformats.org/officeDocument/2006/relationships" xmlns:p="http://schemas.openxmlformats.org/presentationml/2006/main">
   <p:cSld>
     <p:bg>
       <p:bgRef idx="1001">
@@ -130,241 +149,16 @@
           <a:chExt cx="0" cy="0"/>
         </a:xfrm>
       </p:grpSpPr>
-      <p:sp>
-        <p:nvSpPr>
-          <p:cNvPr id="2" name="Header Placeholder 1"/>
-          <p:cNvSpPr>
-            <a:spLocks noGrp="1"/>
-          </p:cNvSpPr>
-          <p:nvPr>
-            <p:ph type="hdr" sz="quarter"/>
-          </p:nvPr>
-        </p:nvSpPr>
-        <p:spPr>
-          <a:xfrm>
-            <a:off x="0" y="0"/>
-            <a:ext cx="2971800" cy="457200"/>
-          </a:xfrm>
-          <a:prstGeom prst="rect">
-            <a:avLst/>
-          </a:prstGeom>
-        </p:spPr>
-        <p:txBody>
-          <a:bodyPr vert="horz" lIns="91440" tIns="45720" rIns="91440" bIns="45720" rtlCol="0"/>
-          <a:lstStyle>
-            <a:lvl1pPr algn="l">
-              <a:defRPr sz="1200"/>
-            </a:lvl1pPr>
-          </a:lstStyle>
-          <a:p>
-            <a:endParaRPr lang="en-US"/>
-          </a:p>
-        </p:txBody>
-      </p:sp>
-      <p:sp>
-        <p:nvSpPr>
-          <p:cNvPr id="3" name="Date Placeholder 2"/>
-          <p:cNvSpPr>
-            <a:spLocks noGrp="1"/>
-          </p:cNvSpPr>
-          <p:nvPr>
-            <p:ph type="dt" idx="1"/>
-          </p:nvPr>
-        </p:nvSpPr>
-        <p:spPr>
-          <a:xfrm>
-            <a:off x="3884613" y="0"/>
-            <a:ext cx="2971800" cy="457200"/>
-          </a:xfrm>
-          <a:prstGeom prst="rect">
-            <a:avLst/>
-          </a:prstGeom>
-        </p:spPr>
-        <p:txBody>
-          <a:bodyPr vert="horz" lIns="91440" tIns="45720" rIns="91440" bIns="45720" rtlCol="0"/>
-          <a:lstStyle>
-            <a:lvl1pPr algn="r">
-              <a:defRPr sz="1200"/>
-            </a:lvl1pPr>
-          </a:lstStyle>
-          <a:p>
-            <a:fld id="{0F89C1C7-3DCD-1040-A9CF-14679D8B5DDD}" type="datetimeFigureOut">
-              <a:rPr lang="en-US" smtClean="0"/>
-              <a:t>10/17/16</a:t>
-            </a:fld>
-            <a:endParaRPr lang="en-US"/>
-          </a:p>
-        </p:txBody>
-      </p:sp>
-      <p:sp>
-        <p:nvSpPr>
-          <p:cNvPr id="4" name="Slide Image Placeholder 3"/>
-          <p:cNvSpPr>
-            <a:spLocks noGrp="1" noRot="1" noChangeAspect="1"/>
-          </p:cNvSpPr>
-          <p:nvPr>
-            <p:ph type="sldImg" idx="2"/>
-          </p:nvPr>
-        </p:nvSpPr>
-        <p:spPr>
-          <a:xfrm>
-            <a:off x="1143000" y="685800"/>
-            <a:ext cx="4572000" cy="3429000"/>
-          </a:xfrm>
-          <a:prstGeom prst="rect">
-            <a:avLst/>
-          </a:prstGeom>
-          <a:noFill/>
-          <a:ln w="12700">
-            <a:solidFill>
-              <a:prstClr val="black"/>
-            </a:solidFill>
-          </a:ln>
-        </p:spPr>
-        <p:txBody>
-          <a:bodyPr vert="horz" lIns="91440" tIns="45720" rIns="91440" bIns="45720" rtlCol="0" anchor="ctr"/>
-          <a:lstStyle/>
-          <a:p>
-            <a:endParaRPr lang="en-US"/>
-          </a:p>
-        </p:txBody>
-      </p:sp>
-      <p:sp>
-        <p:nvSpPr>
-          <p:cNvPr id="5" name="Notes Placeholder 4"/>
-          <p:cNvSpPr>
-            <a:spLocks noGrp="1"/>
-          </p:cNvSpPr>
-          <p:nvPr>
-            <p:ph type="body" sz="quarter" idx="3"/>
-          </p:nvPr>
-        </p:nvSpPr>
-        <p:spPr>
-          <a:xfrm>
-            <a:off x="685800" y="4343400"/>
-            <a:ext cx="5486400" cy="4114800"/>
-          </a:xfrm>
-          <a:prstGeom prst="rect">
-            <a:avLst/>
-          </a:prstGeom>
-        </p:spPr>
-        <p:txBody>
-          <a:bodyPr vert="horz" lIns="91440" tIns="45720" rIns="91440" bIns="45720" rtlCol="0"/>
-          <a:lstStyle/>
-          <a:p>
-            <a:pPr lvl="0"/>
-            <a:r>
-              <a:rPr lang="en-US" smtClean="0"/>
-              <a:t>Click to edit Master text styles</a:t>
-            </a:r>
-          </a:p>
-          <a:p>
-            <a:pPr lvl="1"/>
-            <a:r>
-              <a:rPr lang="en-US" smtClean="0"/>
-              <a:t>Second level</a:t>
-            </a:r>
-          </a:p>
-          <a:p>
-            <a:pPr lvl="2"/>
-            <a:r>
-              <a:rPr lang="en-US" smtClean="0"/>
-              <a:t>Third level</a:t>
-            </a:r>
-          </a:p>
-          <a:p>
-            <a:pPr lvl="3"/>
-            <a:r>
-              <a:rPr lang="en-US" smtClean="0"/>
-              <a:t>Fourth level</a:t>
-            </a:r>
-          </a:p>
-          <a:p>
-            <a:pPr lvl="4"/>
-            <a:r>
-              <a:rPr lang="en-US" smtClean="0"/>
-              <a:t>Fifth level</a:t>
-            </a:r>
-            <a:endParaRPr lang="en-US"/>
-          </a:p>
-        </p:txBody>
-      </p:sp>
-      <p:sp>
-        <p:nvSpPr>
-          <p:cNvPr id="6" name="Footer Placeholder 5"/>
-          <p:cNvSpPr>
-            <a:spLocks noGrp="1"/>
-          </p:cNvSpPr>
-          <p:nvPr>
-            <p:ph type="ftr" sz="quarter" idx="4"/>
-          </p:nvPr>
-        </p:nvSpPr>
-        <p:spPr>
-          <a:xfrm>
-            <a:off x="0" y="8685213"/>
-            <a:ext cx="2971800" cy="457200"/>
-          </a:xfrm>
-          <a:prstGeom prst="rect">
-            <a:avLst/>
-          </a:prstGeom>
-        </p:spPr>
-        <p:txBody>
-          <a:bodyPr vert="horz" lIns="91440" tIns="45720" rIns="91440" bIns="45720" rtlCol="0" anchor="b"/>
-          <a:lstStyle>
-            <a:lvl1pPr algn="l">
-              <a:defRPr sz="1200"/>
-            </a:lvl1pPr>
-          </a:lstStyle>
-          <a:p>
-            <a:endParaRPr lang="en-US"/>
-          </a:p>
-        </p:txBody>
-      </p:sp>
-      <p:sp>
-        <p:nvSpPr>
-          <p:cNvPr id="7" name="Slide Number Placeholder 6"/>
-          <p:cNvSpPr>
-            <a:spLocks noGrp="1"/>
-          </p:cNvSpPr>
-          <p:nvPr>
-            <p:ph type="sldNum" sz="quarter" idx="5"/>
-          </p:nvPr>
-        </p:nvSpPr>
-        <p:spPr>
-          <a:xfrm>
-            <a:off x="3884613" y="8685213"/>
-            <a:ext cx="2971800" cy="457200"/>
-          </a:xfrm>
-          <a:prstGeom prst="rect">
-            <a:avLst/>
-          </a:prstGeom>
-        </p:spPr>
-        <p:txBody>
-          <a:bodyPr vert="horz" lIns="91440" tIns="45720" rIns="91440" bIns="45720" rtlCol="0" anchor="b"/>
-          <a:lstStyle>
-            <a:lvl1pPr algn="r">
-              <a:defRPr sz="1200"/>
-            </a:lvl1pPr>
-          </a:lstStyle>
-          <a:p>
-            <a:fld id="{BB5E49A5-4136-284D-997B-48E1D791AD67}" type="slidenum">
-              <a:rPr lang="en-US" smtClean="0"/>
-              <a:t>‹#›</a:t>
-            </a:fld>
-            <a:endParaRPr lang="en-US"/>
-          </a:p>
-        </p:txBody>
-      </p:sp>
     </p:spTree>
     <p:extLst>
       <p:ext uri="{BB962C8B-B14F-4D97-AF65-F5344CB8AC3E}">
-        <p14:creationId xmlns:p14="http://schemas.microsoft.com/office/powerpoint/2010/main" val="2623252185"/>
+        <p14:creationId xmlns:p14="http://schemas.microsoft.com/office/powerpoint/2010/main" val="2039359561"/>
       </p:ext>
     </p:extLst>
   </p:cSld>
   <p:clrMap bg1="lt1" tx1="dk1" bg2="lt2" tx2="dk2" accent1="accent1" accent2="accent2" accent3="accent3" accent4="accent4" accent5="accent5" accent6="accent6" hlink="hlink" folHlink="folHlink"/>
   <p:notesStyle>
-    <a:lvl1pPr marL="0" algn="l" defTabSz="457200" rtl="0" eaLnBrk="1" latinLnBrk="0" hangingPunct="1">
+    <a:lvl1pPr marL="0" algn="l" defTabSz="914400" rtl="0" eaLnBrk="1" latinLnBrk="0" hangingPunct="1">
       <a:defRPr sz="1200" kern="1200">
         <a:solidFill>
           <a:schemeClr val="tx1"/>
@@ -374,7 +168,7 @@
         <a:cs typeface="+mn-cs"/>
       </a:defRPr>
     </a:lvl1pPr>
-    <a:lvl2pPr marL="457200" algn="l" defTabSz="457200" rtl="0" eaLnBrk="1" latinLnBrk="0" hangingPunct="1">
+    <a:lvl2pPr marL="457200" algn="l" defTabSz="914400" rtl="0" eaLnBrk="1" latinLnBrk="0" hangingPunct="1">
       <a:defRPr sz="1200" kern="1200">
         <a:solidFill>
           <a:schemeClr val="tx1"/>
@@ -384,7 +178,7 @@
         <a:cs typeface="+mn-cs"/>
       </a:defRPr>
     </a:lvl2pPr>
-    <a:lvl3pPr marL="914400" algn="l" defTabSz="457200" rtl="0" eaLnBrk="1" latinLnBrk="0" hangingPunct="1">
+    <a:lvl3pPr marL="914400" algn="l" defTabSz="914400" rtl="0" eaLnBrk="1" latinLnBrk="0" hangingPunct="1">
       <a:defRPr sz="1200" kern="1200">
         <a:solidFill>
           <a:schemeClr val="tx1"/>
@@ -394,7 +188,7 @@
         <a:cs typeface="+mn-cs"/>
       </a:defRPr>
     </a:lvl3pPr>
-    <a:lvl4pPr marL="1371600" algn="l" defTabSz="457200" rtl="0" eaLnBrk="1" latinLnBrk="0" hangingPunct="1">
+    <a:lvl4pPr marL="1371600" algn="l" defTabSz="914400" rtl="0" eaLnBrk="1" latinLnBrk="0" hangingPunct="1">
       <a:defRPr sz="1200" kern="1200">
         <a:solidFill>
           <a:schemeClr val="tx1"/>
@@ -404,7 +198,7 @@
         <a:cs typeface="+mn-cs"/>
       </a:defRPr>
     </a:lvl4pPr>
-    <a:lvl5pPr marL="1828800" algn="l" defTabSz="457200" rtl="0" eaLnBrk="1" latinLnBrk="0" hangingPunct="1">
+    <a:lvl5pPr marL="1828800" algn="l" defTabSz="914400" rtl="0" eaLnBrk="1" latinLnBrk="0" hangingPunct="1">
       <a:defRPr sz="1200" kern="1200">
         <a:solidFill>
           <a:schemeClr val="tx1"/>
@@ -414,7 +208,7 @@
         <a:cs typeface="+mn-cs"/>
       </a:defRPr>
     </a:lvl5pPr>
-    <a:lvl6pPr marL="2286000" algn="l" defTabSz="457200" rtl="0" eaLnBrk="1" latinLnBrk="0" hangingPunct="1">
+    <a:lvl6pPr marL="2286000" algn="l" defTabSz="914400" rtl="0" eaLnBrk="1" latinLnBrk="0" hangingPunct="1">
       <a:defRPr sz="1200" kern="1200">
         <a:solidFill>
           <a:schemeClr val="tx1"/>
@@ -424,7 +218,7 @@
         <a:cs typeface="+mn-cs"/>
       </a:defRPr>
     </a:lvl6pPr>
-    <a:lvl7pPr marL="2743200" algn="l" defTabSz="457200" rtl="0" eaLnBrk="1" latinLnBrk="0" hangingPunct="1">
+    <a:lvl7pPr marL="2743200" algn="l" defTabSz="914400" rtl="0" eaLnBrk="1" latinLnBrk="0" hangingPunct="1">
       <a:defRPr sz="1200" kern="1200">
         <a:solidFill>
           <a:schemeClr val="tx1"/>
@@ -434,7 +228,7 @@
         <a:cs typeface="+mn-cs"/>
       </a:defRPr>
     </a:lvl7pPr>
-    <a:lvl8pPr marL="3200400" algn="l" defTabSz="457200" rtl="0" eaLnBrk="1" latinLnBrk="0" hangingPunct="1">
+    <a:lvl8pPr marL="3200400" algn="l" defTabSz="914400" rtl="0" eaLnBrk="1" latinLnBrk="0" hangingPunct="1">
       <a:defRPr sz="1200" kern="1200">
         <a:solidFill>
           <a:schemeClr val="tx1"/>
@@ -444,7 +238,7 @@
         <a:cs typeface="+mn-cs"/>
       </a:defRPr>
     </a:lvl8pPr>
-    <a:lvl9pPr marL="3657600" algn="l" defTabSz="457200" rtl="0" eaLnBrk="1" latinLnBrk="0" hangingPunct="1">
+    <a:lvl9pPr marL="3657600" algn="l" defTabSz="914400" rtl="0" eaLnBrk="1" latinLnBrk="0" hangingPunct="1">
       <a:defRPr sz="1200" kern="1200">
         <a:solidFill>
           <a:schemeClr val="tx1"/>
@@ -459,7 +253,7 @@
 </file>
 
 <file path=ppt/notesSlides/notesSlide1.xml><?xml version="1.0" encoding="utf-8"?>
-<p:notes xmlns:a="http://schemas.openxmlformats.org/drawingml/2006/main" xmlns:p="http://schemas.openxmlformats.org/presentationml/2006/main" xmlns:r="http://schemas.openxmlformats.org/officeDocument/2006/relationships">
+<p:notes xmlns:a="http://schemas.openxmlformats.org/drawingml/2006/main" xmlns:r="http://schemas.openxmlformats.org/officeDocument/2006/relationships" xmlns:p="http://schemas.openxmlformats.org/presentationml/2006/main">
   <p:cSld>
     <p:spTree>
       <p:nvGrpSpPr>
@@ -479,7 +273,7 @@
         <p:nvSpPr>
           <p:cNvPr id="2" name="Slide Image Placeholder 1"/>
           <p:cNvSpPr>
-            <a:spLocks noGrp="1"/>
+            <a:spLocks noGrp="1" noRot="1" noChangeAspect="1"/>
           </p:cNvSpPr>
           <p:nvPr>
             <p:ph type="sldImg" idx="2"/>
@@ -494,7 +288,7 @@
             <a:spLocks noGrp="1"/>
           </p:cNvSpPr>
           <p:nvPr>
-            <p:ph type="body" idx="3" sz="quarter"/>
+            <p:ph type="body" sz="quarter" idx="3"/>
           </p:nvPr>
         </p:nvSpPr>
         <p:spPr/>
@@ -530,7 +324,7 @@
             <a:spLocks noGrp="1"/>
           </p:cNvSpPr>
           <p:nvPr>
-            <p:ph type="sldNum" idx="5" sz="quarter"/>
+            <p:ph type="sldNum" sz="quarter" idx="5"/>
           </p:nvPr>
         </p:nvSpPr>
         <p:spPr/>
@@ -544,7 +338,7 @@
 </file>
 
 <file path=ppt/notesSlides/notesSlide2.xml><?xml version="1.0" encoding="utf-8"?>
-<p:notes xmlns:a="http://schemas.openxmlformats.org/drawingml/2006/main" xmlns:p="http://schemas.openxmlformats.org/presentationml/2006/main" xmlns:r="http://schemas.openxmlformats.org/officeDocument/2006/relationships">
+<p:notes xmlns:a="http://schemas.openxmlformats.org/drawingml/2006/main" xmlns:r="http://schemas.openxmlformats.org/officeDocument/2006/relationships" xmlns:p="http://schemas.openxmlformats.org/presentationml/2006/main">
   <p:cSld>
     <p:spTree>
       <p:nvGrpSpPr>
@@ -564,7 +358,7 @@
         <p:nvSpPr>
           <p:cNvPr id="2" name="Slide Image Placeholder 1"/>
           <p:cNvSpPr>
-            <a:spLocks noGrp="1"/>
+            <a:spLocks noGrp="1" noRot="1" noChangeAspect="1"/>
           </p:cNvSpPr>
           <p:nvPr>
             <p:ph type="sldImg" idx="2"/>
@@ -579,7 +373,7 @@
             <a:spLocks noGrp="1"/>
           </p:cNvSpPr>
           <p:nvPr>
-            <p:ph type="body" idx="3" sz="quarter"/>
+            <p:ph type="body" sz="quarter" idx="3"/>
           </p:nvPr>
         </p:nvSpPr>
         <p:spPr/>
@@ -620,7 +414,7 @@
             <a:spLocks noGrp="1"/>
           </p:cNvSpPr>
           <p:nvPr>
-            <p:ph type="sldNum" idx="5" sz="quarter"/>
+            <p:ph type="sldNum" sz="quarter" idx="5"/>
           </p:nvPr>
         </p:nvSpPr>
         <p:spPr/>
@@ -671,10 +465,9 @@
           <a:lstStyle/>
           <a:p>
             <a:r>
-              <a:rPr lang="en-US" smtClean="0"/>
+              <a:rPr lang="en-US"/>
               <a:t>Click to edit Master title style</a:t>
             </a:r>
-            <a:endParaRPr lang="en-US"/>
           </a:p>
         </p:txBody>
       </p:sp>
@@ -790,10 +583,9 @@
           </a:lstStyle>
           <a:p>
             <a:r>
-              <a:rPr lang="en-US" smtClean="0"/>
+              <a:rPr lang="en-US"/>
               <a:t>Click to edit Master subtitle style</a:t>
             </a:r>
-            <a:endParaRPr lang="en-US"/>
           </a:p>
         </p:txBody>
       </p:sp>
@@ -814,7 +606,7 @@
           <a:p>
             <a:fld id="{5BCAD085-E8A6-8845-BD4E-CB4CCA059FC4}" type="datetimeFigureOut">
               <a:rPr lang="en-US" smtClean="0"/>
-              <a:t>1/27/13</a:t>
+              <a:t>5/3/26</a:t>
             </a:fld>
             <a:endParaRPr lang="en-US"/>
           </a:p>
@@ -908,10 +700,9 @@
           <a:lstStyle/>
           <a:p>
             <a:r>
-              <a:rPr lang="en-US" smtClean="0"/>
+              <a:rPr lang="en-US"/>
               <a:t>Click to edit Master title style</a:t>
             </a:r>
-            <a:endParaRPr lang="en-US"/>
           </a:p>
         </p:txBody>
       </p:sp>
@@ -932,38 +723,37 @@
           <a:p>
             <a:pPr lvl="0"/>
             <a:r>
-              <a:rPr lang="en-US" smtClean="0"/>
+              <a:rPr lang="en-US"/>
               <a:t>Click to edit Master text styles</a:t>
             </a:r>
           </a:p>
           <a:p>
             <a:pPr lvl="1"/>
             <a:r>
-              <a:rPr lang="en-US" smtClean="0"/>
+              <a:rPr lang="en-US"/>
               <a:t>Second level</a:t>
             </a:r>
           </a:p>
           <a:p>
             <a:pPr lvl="2"/>
             <a:r>
-              <a:rPr lang="en-US" smtClean="0"/>
+              <a:rPr lang="en-US"/>
               <a:t>Third level</a:t>
             </a:r>
           </a:p>
           <a:p>
             <a:pPr lvl="3"/>
             <a:r>
-              <a:rPr lang="en-US" smtClean="0"/>
+              <a:rPr lang="en-US"/>
               <a:t>Fourth level</a:t>
             </a:r>
           </a:p>
           <a:p>
             <a:pPr lvl="4"/>
             <a:r>
-              <a:rPr lang="en-US" smtClean="0"/>
+              <a:rPr lang="en-US"/>
               <a:t>Fifth level</a:t>
             </a:r>
-            <a:endParaRPr lang="en-US"/>
           </a:p>
         </p:txBody>
       </p:sp>
@@ -984,7 +774,7 @@
           <a:p>
             <a:fld id="{5BCAD085-E8A6-8845-BD4E-CB4CCA059FC4}" type="datetimeFigureOut">
               <a:rPr lang="en-US" smtClean="0"/>
-              <a:t>1/27/13</a:t>
+              <a:t>5/3/26</a:t>
             </a:fld>
             <a:endParaRPr lang="en-US"/>
           </a:p>
@@ -1083,10 +873,9 @@
           <a:lstStyle/>
           <a:p>
             <a:r>
-              <a:rPr lang="en-US" smtClean="0"/>
+              <a:rPr lang="en-US"/>
               <a:t>Click to edit Master title style</a:t>
             </a:r>
-            <a:endParaRPr lang="en-US"/>
           </a:p>
         </p:txBody>
       </p:sp>
@@ -1112,38 +901,37 @@
           <a:p>
             <a:pPr lvl="0"/>
             <a:r>
-              <a:rPr lang="en-US" smtClean="0"/>
+              <a:rPr lang="en-US"/>
               <a:t>Click to edit Master text styles</a:t>
             </a:r>
           </a:p>
           <a:p>
             <a:pPr lvl="1"/>
             <a:r>
-              <a:rPr lang="en-US" smtClean="0"/>
+              <a:rPr lang="en-US"/>
               <a:t>Second level</a:t>
             </a:r>
           </a:p>
           <a:p>
             <a:pPr lvl="2"/>
             <a:r>
-              <a:rPr lang="en-US" smtClean="0"/>
+              <a:rPr lang="en-US"/>
               <a:t>Third level</a:t>
             </a:r>
           </a:p>
           <a:p>
             <a:pPr lvl="3"/>
             <a:r>
-              <a:rPr lang="en-US" smtClean="0"/>
+              <a:rPr lang="en-US"/>
               <a:t>Fourth level</a:t>
             </a:r>
           </a:p>
           <a:p>
             <a:pPr lvl="4"/>
             <a:r>
-              <a:rPr lang="en-US" smtClean="0"/>
+              <a:rPr lang="en-US"/>
               <a:t>Fifth level</a:t>
             </a:r>
-            <a:endParaRPr lang="en-US"/>
           </a:p>
         </p:txBody>
       </p:sp>
@@ -1164,7 +952,7 @@
           <a:p>
             <a:fld id="{5BCAD085-E8A6-8845-BD4E-CB4CCA059FC4}" type="datetimeFigureOut">
               <a:rPr lang="en-US" smtClean="0"/>
-              <a:t>1/27/13</a:t>
+              <a:t>5/3/26</a:t>
             </a:fld>
             <a:endParaRPr lang="en-US"/>
           </a:p>
@@ -1258,10 +1046,9 @@
           <a:lstStyle/>
           <a:p>
             <a:r>
-              <a:rPr lang="en-US" smtClean="0"/>
+              <a:rPr lang="en-US"/>
               <a:t>Click to edit Master title style</a:t>
             </a:r>
-            <a:endParaRPr lang="en-US"/>
           </a:p>
         </p:txBody>
       </p:sp>
@@ -1282,38 +1069,37 @@
           <a:p>
             <a:pPr lvl="0"/>
             <a:r>
-              <a:rPr lang="en-US" smtClean="0"/>
+              <a:rPr lang="en-US"/>
               <a:t>Click to edit Master text styles</a:t>
             </a:r>
           </a:p>
           <a:p>
             <a:pPr lvl="1"/>
             <a:r>
-              <a:rPr lang="en-US" smtClean="0"/>
+              <a:rPr lang="en-US"/>
               <a:t>Second level</a:t>
             </a:r>
           </a:p>
           <a:p>
             <a:pPr lvl="2"/>
             <a:r>
-              <a:rPr lang="en-US" smtClean="0"/>
+              <a:rPr lang="en-US"/>
               <a:t>Third level</a:t>
             </a:r>
           </a:p>
           <a:p>
             <a:pPr lvl="3"/>
             <a:r>
-              <a:rPr lang="en-US" smtClean="0"/>
+              <a:rPr lang="en-US"/>
               <a:t>Fourth level</a:t>
             </a:r>
           </a:p>
           <a:p>
             <a:pPr lvl="4"/>
             <a:r>
-              <a:rPr lang="en-US" smtClean="0"/>
+              <a:rPr lang="en-US"/>
               <a:t>Fifth level</a:t>
             </a:r>
-            <a:endParaRPr lang="en-US"/>
           </a:p>
         </p:txBody>
       </p:sp>
@@ -1334,7 +1120,7 @@
           <a:p>
             <a:fld id="{5BCAD085-E8A6-8845-BD4E-CB4CCA059FC4}" type="datetimeFigureOut">
               <a:rPr lang="en-US" smtClean="0"/>
-              <a:t>1/27/13</a:t>
+              <a:t>5/3/26</a:t>
             </a:fld>
             <a:endParaRPr lang="en-US"/>
           </a:p>
@@ -1437,10 +1223,9 @@
           </a:lstStyle>
           <a:p>
             <a:r>
-              <a:rPr lang="en-US" smtClean="0"/>
+              <a:rPr lang="en-US"/>
               <a:t>Click to edit Master title style</a:t>
             </a:r>
-            <a:endParaRPr lang="en-US"/>
           </a:p>
         </p:txBody>
       </p:sp>
@@ -1557,7 +1342,7 @@
           <a:p>
             <a:pPr lvl="0"/>
             <a:r>
-              <a:rPr lang="en-US" smtClean="0"/>
+              <a:rPr lang="en-US"/>
               <a:t>Click to edit Master text styles</a:t>
             </a:r>
           </a:p>
@@ -1580,7 +1365,7 @@
           <a:p>
             <a:fld id="{5BCAD085-E8A6-8845-BD4E-CB4CCA059FC4}" type="datetimeFigureOut">
               <a:rPr lang="en-US" smtClean="0"/>
-              <a:t>1/27/13</a:t>
+              <a:t>5/3/26</a:t>
             </a:fld>
             <a:endParaRPr lang="en-US"/>
           </a:p>
@@ -1674,10 +1459,9 @@
           <a:lstStyle/>
           <a:p>
             <a:r>
-              <a:rPr lang="en-US" smtClean="0"/>
+              <a:rPr lang="en-US"/>
               <a:t>Click to edit Master title style</a:t>
             </a:r>
-            <a:endParaRPr lang="en-US"/>
           </a:p>
         </p:txBody>
       </p:sp>
@@ -1731,38 +1515,37 @@
           <a:p>
             <a:pPr lvl="0"/>
             <a:r>
-              <a:rPr lang="en-US" smtClean="0"/>
+              <a:rPr lang="en-US"/>
               <a:t>Click to edit Master text styles</a:t>
             </a:r>
           </a:p>
           <a:p>
             <a:pPr lvl="1"/>
             <a:r>
-              <a:rPr lang="en-US" smtClean="0"/>
+              <a:rPr lang="en-US"/>
               <a:t>Second level</a:t>
             </a:r>
           </a:p>
           <a:p>
             <a:pPr lvl="2"/>
             <a:r>
-              <a:rPr lang="en-US" smtClean="0"/>
+              <a:rPr lang="en-US"/>
               <a:t>Third level</a:t>
             </a:r>
           </a:p>
           <a:p>
             <a:pPr lvl="3"/>
             <a:r>
-              <a:rPr lang="en-US" smtClean="0"/>
+              <a:rPr lang="en-US"/>
               <a:t>Fourth level</a:t>
             </a:r>
           </a:p>
           <a:p>
             <a:pPr lvl="4"/>
             <a:r>
-              <a:rPr lang="en-US" smtClean="0"/>
+              <a:rPr lang="en-US"/>
               <a:t>Fifth level</a:t>
             </a:r>
-            <a:endParaRPr lang="en-US"/>
           </a:p>
         </p:txBody>
       </p:sp>
@@ -1816,38 +1599,37 @@
           <a:p>
             <a:pPr lvl="0"/>
             <a:r>
-              <a:rPr lang="en-US" smtClean="0"/>
+              <a:rPr lang="en-US"/>
               <a:t>Click to edit Master text styles</a:t>
             </a:r>
           </a:p>
           <a:p>
             <a:pPr lvl="1"/>
             <a:r>
-              <a:rPr lang="en-US" smtClean="0"/>
+              <a:rPr lang="en-US"/>
               <a:t>Second level</a:t>
             </a:r>
           </a:p>
           <a:p>
             <a:pPr lvl="2"/>
             <a:r>
-              <a:rPr lang="en-US" smtClean="0"/>
+              <a:rPr lang="en-US"/>
               <a:t>Third level</a:t>
             </a:r>
           </a:p>
           <a:p>
             <a:pPr lvl="3"/>
             <a:r>
-              <a:rPr lang="en-US" smtClean="0"/>
+              <a:rPr lang="en-US"/>
               <a:t>Fourth level</a:t>
             </a:r>
           </a:p>
           <a:p>
             <a:pPr lvl="4"/>
             <a:r>
-              <a:rPr lang="en-US" smtClean="0"/>
+              <a:rPr lang="en-US"/>
               <a:t>Fifth level</a:t>
             </a:r>
-            <a:endParaRPr lang="en-US"/>
           </a:p>
         </p:txBody>
       </p:sp>
@@ -1868,7 +1650,7 @@
           <a:p>
             <a:fld id="{5BCAD085-E8A6-8845-BD4E-CB4CCA059FC4}" type="datetimeFigureOut">
               <a:rPr lang="en-US" smtClean="0"/>
-              <a:t>1/27/13</a:t>
+              <a:t>5/3/26</a:t>
             </a:fld>
             <a:endParaRPr lang="en-US"/>
           </a:p>
@@ -1966,10 +1748,9 @@
           </a:lstStyle>
           <a:p>
             <a:r>
-              <a:rPr lang="en-US" smtClean="0"/>
+              <a:rPr lang="en-US"/>
               <a:t>Click to edit Master title style</a:t>
             </a:r>
-            <a:endParaRPr lang="en-US"/>
           </a:p>
         </p:txBody>
       </p:sp>
@@ -2032,7 +1813,7 @@
           <a:p>
             <a:pPr lvl="0"/>
             <a:r>
-              <a:rPr lang="en-US" smtClean="0"/>
+              <a:rPr lang="en-US"/>
               <a:t>Click to edit Master text styles</a:t>
             </a:r>
           </a:p>
@@ -2088,38 +1869,37 @@
           <a:p>
             <a:pPr lvl="0"/>
             <a:r>
-              <a:rPr lang="en-US" smtClean="0"/>
+              <a:rPr lang="en-US"/>
               <a:t>Click to edit Master text styles</a:t>
             </a:r>
           </a:p>
           <a:p>
             <a:pPr lvl="1"/>
             <a:r>
-              <a:rPr lang="en-US" smtClean="0"/>
+              <a:rPr lang="en-US"/>
               <a:t>Second level</a:t>
             </a:r>
           </a:p>
           <a:p>
             <a:pPr lvl="2"/>
             <a:r>
-              <a:rPr lang="en-US" smtClean="0"/>
+              <a:rPr lang="en-US"/>
               <a:t>Third level</a:t>
             </a:r>
           </a:p>
           <a:p>
             <a:pPr lvl="3"/>
             <a:r>
-              <a:rPr lang="en-US" smtClean="0"/>
+              <a:rPr lang="en-US"/>
               <a:t>Fourth level</a:t>
             </a:r>
           </a:p>
           <a:p>
             <a:pPr lvl="4"/>
             <a:r>
-              <a:rPr lang="en-US" smtClean="0"/>
+              <a:rPr lang="en-US"/>
               <a:t>Fifth level</a:t>
             </a:r>
-            <a:endParaRPr lang="en-US"/>
           </a:p>
         </p:txBody>
       </p:sp>
@@ -2182,7 +1962,7 @@
           <a:p>
             <a:pPr lvl="0"/>
             <a:r>
-              <a:rPr lang="en-US" smtClean="0"/>
+              <a:rPr lang="en-US"/>
               <a:t>Click to edit Master text styles</a:t>
             </a:r>
           </a:p>
@@ -2238,38 +2018,37 @@
           <a:p>
             <a:pPr lvl="0"/>
             <a:r>
-              <a:rPr lang="en-US" smtClean="0"/>
+              <a:rPr lang="en-US"/>
               <a:t>Click to edit Master text styles</a:t>
             </a:r>
           </a:p>
           <a:p>
             <a:pPr lvl="1"/>
             <a:r>
-              <a:rPr lang="en-US" smtClean="0"/>
+              <a:rPr lang="en-US"/>
               <a:t>Second level</a:t>
             </a:r>
           </a:p>
           <a:p>
             <a:pPr lvl="2"/>
             <a:r>
-              <a:rPr lang="en-US" smtClean="0"/>
+              <a:rPr lang="en-US"/>
               <a:t>Third level</a:t>
             </a:r>
           </a:p>
           <a:p>
             <a:pPr lvl="3"/>
             <a:r>
-              <a:rPr lang="en-US" smtClean="0"/>
+              <a:rPr lang="en-US"/>
               <a:t>Fourth level</a:t>
             </a:r>
           </a:p>
           <a:p>
             <a:pPr lvl="4"/>
             <a:r>
-              <a:rPr lang="en-US" smtClean="0"/>
+              <a:rPr lang="en-US"/>
               <a:t>Fifth level</a:t>
             </a:r>
-            <a:endParaRPr lang="en-US"/>
           </a:p>
         </p:txBody>
       </p:sp>
@@ -2290,7 +2069,7 @@
           <a:p>
             <a:fld id="{5BCAD085-E8A6-8845-BD4E-CB4CCA059FC4}" type="datetimeFigureOut">
               <a:rPr lang="en-US" smtClean="0"/>
-              <a:t>1/27/13</a:t>
+              <a:t>5/3/26</a:t>
             </a:fld>
             <a:endParaRPr lang="en-US"/>
           </a:p>
@@ -2384,10 +2163,9 @@
           <a:lstStyle/>
           <a:p>
             <a:r>
-              <a:rPr lang="en-US" smtClean="0"/>
+              <a:rPr lang="en-US"/>
               <a:t>Click to edit Master title style</a:t>
             </a:r>
-            <a:endParaRPr lang="en-US"/>
           </a:p>
         </p:txBody>
       </p:sp>
@@ -2408,7 +2186,7 @@
           <a:p>
             <a:fld id="{5BCAD085-E8A6-8845-BD4E-CB4CCA059FC4}" type="datetimeFigureOut">
               <a:rPr lang="en-US" smtClean="0"/>
-              <a:t>1/27/13</a:t>
+              <a:t>5/3/26</a:t>
             </a:fld>
             <a:endParaRPr lang="en-US"/>
           </a:p>
@@ -2503,7 +2281,7 @@
           <a:p>
             <a:fld id="{5BCAD085-E8A6-8845-BD4E-CB4CCA059FC4}" type="datetimeFigureOut">
               <a:rPr lang="en-US" smtClean="0"/>
-              <a:t>1/27/13</a:t>
+              <a:t>5/3/26</a:t>
             </a:fld>
             <a:endParaRPr lang="en-US"/>
           </a:p>
@@ -2606,10 +2384,9 @@
           </a:lstStyle>
           <a:p>
             <a:r>
-              <a:rPr lang="en-US" smtClean="0"/>
+              <a:rPr lang="en-US"/>
               <a:t>Click to edit Master title style</a:t>
             </a:r>
-            <a:endParaRPr lang="en-US"/>
           </a:p>
         </p:txBody>
       </p:sp>
@@ -2663,38 +2440,37 @@
           <a:p>
             <a:pPr lvl="0"/>
             <a:r>
-              <a:rPr lang="en-US" smtClean="0"/>
+              <a:rPr lang="en-US"/>
               <a:t>Click to edit Master text styles</a:t>
             </a:r>
           </a:p>
           <a:p>
             <a:pPr lvl="1"/>
             <a:r>
-              <a:rPr lang="en-US" smtClean="0"/>
+              <a:rPr lang="en-US"/>
               <a:t>Second level</a:t>
             </a:r>
           </a:p>
           <a:p>
             <a:pPr lvl="2"/>
             <a:r>
-              <a:rPr lang="en-US" smtClean="0"/>
+              <a:rPr lang="en-US"/>
               <a:t>Third level</a:t>
             </a:r>
           </a:p>
           <a:p>
             <a:pPr lvl="3"/>
             <a:r>
-              <a:rPr lang="en-US" smtClean="0"/>
+              <a:rPr lang="en-US"/>
               <a:t>Fourth level</a:t>
             </a:r>
           </a:p>
           <a:p>
             <a:pPr lvl="4"/>
             <a:r>
-              <a:rPr lang="en-US" smtClean="0"/>
+              <a:rPr lang="en-US"/>
               <a:t>Fifth level</a:t>
             </a:r>
-            <a:endParaRPr lang="en-US"/>
           </a:p>
         </p:txBody>
       </p:sp>
@@ -2757,7 +2533,7 @@
           <a:p>
             <a:pPr lvl="0"/>
             <a:r>
-              <a:rPr lang="en-US" smtClean="0"/>
+              <a:rPr lang="en-US"/>
               <a:t>Click to edit Master text styles</a:t>
             </a:r>
           </a:p>
@@ -2780,7 +2556,7 @@
           <a:p>
             <a:fld id="{5BCAD085-E8A6-8845-BD4E-CB4CCA059FC4}" type="datetimeFigureOut">
               <a:rPr lang="en-US" smtClean="0"/>
-              <a:t>1/27/13</a:t>
+              <a:t>5/3/26</a:t>
             </a:fld>
             <a:endParaRPr lang="en-US"/>
           </a:p>
@@ -2883,10 +2659,9 @@
           </a:lstStyle>
           <a:p>
             <a:r>
-              <a:rPr lang="en-US" smtClean="0"/>
+              <a:rPr lang="en-US"/>
               <a:t>Click to edit Master title style</a:t>
             </a:r>
-            <a:endParaRPr lang="en-US"/>
           </a:p>
         </p:txBody>
       </p:sp>
@@ -3010,7 +2785,7 @@
           <a:p>
             <a:pPr lvl="0"/>
             <a:r>
-              <a:rPr lang="en-US" smtClean="0"/>
+              <a:rPr lang="en-US"/>
               <a:t>Click to edit Master text styles</a:t>
             </a:r>
           </a:p>
@@ -3033,7 +2808,7 @@
           <a:p>
             <a:fld id="{5BCAD085-E8A6-8845-BD4E-CB4CCA059FC4}" type="datetimeFigureOut">
               <a:rPr lang="en-US" smtClean="0"/>
-              <a:t>1/27/13</a:t>
+              <a:t>5/3/26</a:t>
             </a:fld>
             <a:endParaRPr lang="en-US"/>
           </a:p>
@@ -3142,10 +2917,9 @@
           <a:lstStyle/>
           <a:p>
             <a:r>
-              <a:rPr lang="en-US" smtClean="0"/>
+              <a:rPr lang="en-US"/>
               <a:t>Click to edit Master title style</a:t>
             </a:r>
-            <a:endParaRPr lang="en-US"/>
           </a:p>
         </p:txBody>
       </p:sp>
@@ -3176,38 +2950,37 @@
           <a:p>
             <a:pPr lvl="0"/>
             <a:r>
-              <a:rPr lang="en-US" smtClean="0"/>
+              <a:rPr lang="en-US"/>
               <a:t>Click to edit Master text styles</a:t>
             </a:r>
           </a:p>
           <a:p>
             <a:pPr lvl="1"/>
             <a:r>
-              <a:rPr lang="en-US" smtClean="0"/>
+              <a:rPr lang="en-US"/>
               <a:t>Second level</a:t>
             </a:r>
           </a:p>
           <a:p>
             <a:pPr lvl="2"/>
             <a:r>
-              <a:rPr lang="en-US" smtClean="0"/>
+              <a:rPr lang="en-US"/>
               <a:t>Third level</a:t>
             </a:r>
           </a:p>
           <a:p>
             <a:pPr lvl="3"/>
             <a:r>
-              <a:rPr lang="en-US" smtClean="0"/>
+              <a:rPr lang="en-US"/>
               <a:t>Fourth level</a:t>
             </a:r>
           </a:p>
           <a:p>
             <a:pPr lvl="4"/>
             <a:r>
-              <a:rPr lang="en-US" smtClean="0"/>
+              <a:rPr lang="en-US"/>
               <a:t>Fifth level</a:t>
             </a:r>
-            <a:endParaRPr lang="en-US"/>
           </a:p>
         </p:txBody>
       </p:sp>
@@ -3246,7 +3019,7 @@
           <a:p>
             <a:fld id="{5BCAD085-E8A6-8845-BD4E-CB4CCA059FC4}" type="datetimeFigureOut">
               <a:rPr lang="en-US" smtClean="0"/>
-              <a:t>1/27/13</a:t>
+              <a:t>5/3/26</a:t>
             </a:fld>
             <a:endParaRPr lang="en-US"/>
           </a:p>
@@ -3605,7 +3378,7 @@
 </file>
 
 <file path=ppt/slides/slide1.xml><?xml version="1.0" encoding="utf-8"?>
-<p:sld xmlns:a="http://schemas.openxmlformats.org/drawingml/2006/main" xmlns:p="http://schemas.openxmlformats.org/presentationml/2006/main" xmlns:r="http://schemas.openxmlformats.org/officeDocument/2006/relationships">
+<p:sld xmlns:a="http://schemas.openxmlformats.org/drawingml/2006/main" xmlns:r="http://schemas.openxmlformats.org/officeDocument/2006/relationships" xmlns:p="http://schemas.openxmlformats.org/presentationml/2006/main">
   <p:cSld>
     <p:bg>
       <p:bgPr>
@@ -3621,7 +3394,14 @@
         <p:cNvGrpSpPr/>
         <p:nvPr/>
       </p:nvGrpSpPr>
-      <p:grpSpPr/>
+      <p:grpSpPr>
+        <a:xfrm>
+          <a:off x="0" y="0"/>
+          <a:ext cx="0" cy="0"/>
+          <a:chOff x="0" y="0"/>
+          <a:chExt cx="0" cy="0"/>
+        </a:xfrm>
+      </p:grpSpPr>
       <p:sp>
         <p:nvSpPr>
           <p:cNvPr id="2" name="Rectangle 1"/>
@@ -3662,6 +3442,7 @@
           <a:lstStyle/>
           <a:p>
             <a:pPr algn="ctr"/>
+            <a:endParaRPr/>
           </a:p>
         </p:txBody>
       </p:sp>
@@ -3705,6 +3486,7 @@
           <a:lstStyle/>
           <a:p>
             <a:pPr algn="ctr"/>
+            <a:endParaRPr/>
           </a:p>
         </p:txBody>
       </p:sp>
@@ -3748,6 +3530,7 @@
           <a:lstStyle/>
           <a:p>
             <a:pPr algn="ctr"/>
+            <a:endParaRPr/>
           </a:p>
         </p:txBody>
       </p:sp>
@@ -3791,6 +3574,7 @@
           <a:lstStyle/>
           <a:p>
             <a:pPr algn="ctr"/>
+            <a:endParaRPr/>
           </a:p>
         </p:txBody>
       </p:sp>
@@ -3834,6 +3618,7 @@
           <a:lstStyle/>
           <a:p>
             <a:pPr algn="ctr"/>
+            <a:endParaRPr/>
           </a:p>
         </p:txBody>
       </p:sp>
@@ -3854,7 +3639,7 @@
           <a:noFill/>
         </p:spPr>
         <p:txBody>
-          <a:bodyPr wrap="square" lIns="36576" rIns="36576" tIns="18288" bIns="18288" anchor="t">
+          <a:bodyPr wrap="square" lIns="36576" tIns="18288" rIns="36576" bIns="18288" anchor="t">
             <a:spAutoFit/>
           </a:bodyPr>
           <a:lstStyle/>
@@ -3889,7 +3674,7 @@
           <a:noFill/>
         </p:spPr>
         <p:txBody>
-          <a:bodyPr wrap="square" lIns="36576" rIns="36576" tIns="18288" bIns="18288" anchor="t">
+          <a:bodyPr wrap="square" lIns="36576" tIns="18288" rIns="36576" bIns="18288" anchor="t">
             <a:spAutoFit/>
           </a:bodyPr>
           <a:lstStyle/>
@@ -3951,6 +3736,7 @@
           <a:lstStyle/>
           <a:p>
             <a:pPr algn="ctr"/>
+            <a:endParaRPr/>
           </a:p>
         </p:txBody>
       </p:sp>
@@ -3971,7 +3757,7 @@
           <a:noFill/>
         </p:spPr>
         <p:txBody>
-          <a:bodyPr wrap="square" lIns="36576" rIns="36576" tIns="18288" bIns="18288" anchor="t">
+          <a:bodyPr wrap="square" lIns="36576" tIns="18288" rIns="36576" bIns="18288" anchor="t">
             <a:spAutoFit/>
           </a:bodyPr>
           <a:lstStyle/>
@@ -4033,6 +3819,7 @@
           <a:lstStyle/>
           <a:p>
             <a:pPr algn="ctr"/>
+            <a:endParaRPr/>
           </a:p>
         </p:txBody>
       </p:sp>
@@ -4053,7 +3840,7 @@
           <a:noFill/>
         </p:spPr>
         <p:txBody>
-          <a:bodyPr wrap="square" lIns="36576" rIns="36576" tIns="18288" bIns="18288" anchor="t">
+          <a:bodyPr wrap="square" lIns="36576" tIns="18288" rIns="36576" bIns="18288" anchor="t">
             <a:spAutoFit/>
           </a:bodyPr>
           <a:lstStyle/>
@@ -4115,6 +3902,7 @@
           <a:lstStyle/>
           <a:p>
             <a:pPr algn="ctr"/>
+            <a:endParaRPr/>
           </a:p>
         </p:txBody>
       </p:sp>
@@ -4135,7 +3923,7 @@
           <a:noFill/>
         </p:spPr>
         <p:txBody>
-          <a:bodyPr wrap="square" lIns="36576" rIns="36576" tIns="18288" bIns="18288" anchor="t">
+          <a:bodyPr wrap="square" lIns="36576" tIns="18288" rIns="36576" bIns="18288" anchor="t">
             <a:spAutoFit/>
           </a:bodyPr>
           <a:lstStyle/>
@@ -4197,6 +3985,7 @@
           <a:lstStyle/>
           <a:p>
             <a:pPr algn="ctr"/>
+            <a:endParaRPr/>
           </a:p>
         </p:txBody>
       </p:sp>
@@ -4217,7 +4006,7 @@
           <a:noFill/>
         </p:spPr>
         <p:txBody>
-          <a:bodyPr wrap="square" lIns="36576" rIns="36576" tIns="18288" bIns="18288" anchor="t">
+          <a:bodyPr wrap="square" lIns="36576" tIns="18288" rIns="36576" bIns="18288" anchor="t">
             <a:spAutoFit/>
           </a:bodyPr>
           <a:lstStyle/>
@@ -4279,6 +4068,7 @@
           <a:lstStyle/>
           <a:p>
             <a:pPr algn="ctr"/>
+            <a:endParaRPr/>
           </a:p>
         </p:txBody>
       </p:sp>
@@ -4299,7 +4089,7 @@
           <a:noFill/>
         </p:spPr>
         <p:txBody>
-          <a:bodyPr wrap="square" lIns="36576" rIns="36576" tIns="18288" bIns="18288" anchor="t">
+          <a:bodyPr wrap="square" lIns="36576" tIns="18288" rIns="36576" bIns="18288" anchor="t">
             <a:spAutoFit/>
           </a:bodyPr>
           <a:lstStyle/>
@@ -4361,6 +4151,7 @@
           <a:lstStyle/>
           <a:p>
             <a:pPr algn="ctr"/>
+            <a:endParaRPr/>
           </a:p>
         </p:txBody>
       </p:sp>
@@ -4404,6 +4195,7 @@
           <a:lstStyle/>
           <a:p>
             <a:pPr algn="ctr"/>
+            <a:endParaRPr/>
           </a:p>
         </p:txBody>
       </p:sp>
@@ -4447,6 +4239,7 @@
           <a:lstStyle/>
           <a:p>
             <a:pPr algn="ctr"/>
+            <a:endParaRPr/>
           </a:p>
         </p:txBody>
       </p:sp>
@@ -4467,7 +4260,7 @@
           <a:noFill/>
         </p:spPr>
         <p:txBody>
-          <a:bodyPr wrap="square" lIns="36576" rIns="36576" tIns="18288" bIns="18288" anchor="t">
+          <a:bodyPr wrap="square" lIns="36576" tIns="18288" rIns="36576" bIns="18288" anchor="t">
             <a:spAutoFit/>
           </a:bodyPr>
           <a:lstStyle/>
@@ -4502,7 +4295,7 @@
           <a:noFill/>
         </p:spPr>
         <p:txBody>
-          <a:bodyPr wrap="square" lIns="36576" rIns="36576" tIns="18288" bIns="18288" anchor="t">
+          <a:bodyPr wrap="square" lIns="36576" tIns="18288" rIns="36576" bIns="18288" anchor="t">
             <a:spAutoFit/>
           </a:bodyPr>
           <a:lstStyle/>
@@ -4562,6 +4355,7 @@
           <a:lstStyle/>
           <a:p>
             <a:pPr algn="ctr"/>
+            <a:endParaRPr/>
           </a:p>
         </p:txBody>
       </p:sp>
@@ -4635,7 +4429,7 @@
           <a:noFill/>
         </p:spPr>
         <p:txBody>
-          <a:bodyPr wrap="square" lIns="36576" rIns="36576" tIns="18288" bIns="18288" anchor="t">
+          <a:bodyPr wrap="square" lIns="36576" tIns="18288" rIns="36576" bIns="18288" anchor="t">
             <a:spAutoFit/>
           </a:bodyPr>
           <a:lstStyle/>
@@ -4693,6 +4487,7 @@
           <a:lstStyle/>
           <a:p>
             <a:pPr algn="ctr"/>
+            <a:endParaRPr/>
           </a:p>
         </p:txBody>
       </p:sp>
@@ -4713,7 +4508,7 @@
           <a:noFill/>
         </p:spPr>
         <p:txBody>
-          <a:bodyPr wrap="square" lIns="36576" rIns="36576" tIns="18288" bIns="18288" anchor="t">
+          <a:bodyPr wrap="square" lIns="36576" tIns="18288" rIns="36576" bIns="18288" anchor="t">
             <a:spAutoFit/>
           </a:bodyPr>
           <a:lstStyle/>
@@ -4771,6 +4566,7 @@
           <a:lstStyle/>
           <a:p>
             <a:pPr algn="ctr"/>
+            <a:endParaRPr/>
           </a:p>
         </p:txBody>
       </p:sp>
@@ -4791,7 +4587,7 @@
           <a:noFill/>
         </p:spPr>
         <p:txBody>
-          <a:bodyPr wrap="square" lIns="36576" rIns="36576" tIns="18288" bIns="18288" anchor="t">
+          <a:bodyPr wrap="square" lIns="36576" tIns="18288" rIns="36576" bIns="18288" anchor="t">
             <a:spAutoFit/>
           </a:bodyPr>
           <a:lstStyle/>
@@ -4849,6 +4645,7 @@
           <a:lstStyle/>
           <a:p>
             <a:pPr algn="ctr"/>
+            <a:endParaRPr/>
           </a:p>
         </p:txBody>
       </p:sp>
@@ -4861,7 +4658,7 @@
         <p:spPr>
           <a:xfrm>
             <a:off x="429768" y="2752344"/>
-            <a:ext cx="2441448" cy="219456"/>
+            <a:ext cx="2441448" cy="167738"/>
           </a:xfrm>
           <a:prstGeom prst="rect">
             <a:avLst/>
@@ -4869,7 +4666,7 @@
           <a:noFill/>
         </p:spPr>
         <p:txBody>
-          <a:bodyPr wrap="square" lIns="36576" rIns="36576" tIns="18288" bIns="18288" anchor="t">
+          <a:bodyPr wrap="square" lIns="36576" tIns="18288" rIns="36576" bIns="18288" anchor="t">
             <a:spAutoFit/>
           </a:bodyPr>
           <a:lstStyle/>
@@ -4882,7 +4679,12 @@
               </a:defRPr>
             </a:pPr>
             <a:r>
-              <a:t>MD5 content-hash fingerprinting</a:t>
+              <a:rPr lang="en-US" dirty="0"/>
+              <a:t>SHA 256</a:t>
+            </a:r>
+            <a:r>
+              <a:rPr dirty="0"/>
+              <a:t> content-hash fingerprinting</a:t>
             </a:r>
           </a:p>
         </p:txBody>
@@ -4927,6 +4729,7 @@
           <a:lstStyle/>
           <a:p>
             <a:pPr algn="ctr"/>
+            <a:endParaRPr/>
           </a:p>
         </p:txBody>
       </p:sp>
@@ -4947,7 +4750,7 @@
           <a:noFill/>
         </p:spPr>
         <p:txBody>
-          <a:bodyPr wrap="square" lIns="36576" rIns="36576" tIns="18288" bIns="18288" anchor="t">
+          <a:bodyPr wrap="square" lIns="36576" tIns="18288" rIns="36576" bIns="18288" anchor="t">
             <a:spAutoFit/>
           </a:bodyPr>
           <a:lstStyle/>
@@ -5007,6 +4810,7 @@
           <a:lstStyle/>
           <a:p>
             <a:pPr algn="ctr"/>
+            <a:endParaRPr/>
           </a:p>
         </p:txBody>
       </p:sp>
@@ -5144,6 +4948,7 @@
           <a:lstStyle/>
           <a:p>
             <a:pPr algn="ctr"/>
+            <a:endParaRPr/>
           </a:p>
         </p:txBody>
       </p:sp>
@@ -5156,7 +4961,7 @@
         <p:spPr>
           <a:xfrm>
             <a:off x="310896" y="3877056"/>
-            <a:ext cx="2532887" cy="393192"/>
+            <a:ext cx="2532887" cy="340606"/>
           </a:xfrm>
           <a:prstGeom prst="rect">
             <a:avLst/>
@@ -5180,7 +4985,16 @@
               </a:defRPr>
             </a:pPr>
             <a:r>
-              <a:t>OUT → Milvus: </a:t>
+              <a:rPr dirty="0"/>
+              <a:t>OUT → </a:t>
+            </a:r>
+            <a:r>
+              <a:rPr lang="en-US" dirty="0"/>
+              <a:t>Postgres</a:t>
+            </a:r>
+            <a:r>
+              <a:rPr dirty="0"/>
+              <a:t>: </a:t>
             </a:r>
           </a:p>
           <a:p>
@@ -5195,8 +5009,10 @@
               </a:defRPr>
             </a:pPr>
             <a:r>
-              <a:t>ingestion_catalog.json</a:t>
-            </a:r>
+              <a:rPr lang="en-US" dirty="0"/>
+              <a:t>Workspace    Artifact</a:t>
+            </a:r>
+            <a:endParaRPr dirty="0"/>
           </a:p>
         </p:txBody>
       </p:sp>
@@ -5217,7 +5033,7 @@
           <a:noFill/>
         </p:spPr>
         <p:txBody>
-          <a:bodyPr wrap="square" lIns="36576" rIns="36576" tIns="18288" bIns="18288" anchor="t">
+          <a:bodyPr wrap="square" lIns="36576" tIns="18288" rIns="36576" bIns="18288" anchor="t">
             <a:spAutoFit/>
           </a:bodyPr>
           <a:lstStyle/>
@@ -5279,6 +5095,7 @@
           <a:lstStyle/>
           <a:p>
             <a:pPr algn="ctr"/>
+            <a:endParaRPr/>
           </a:p>
         </p:txBody>
       </p:sp>
@@ -5290,7 +5107,7 @@
         </p:nvSpPr>
         <p:spPr>
           <a:xfrm>
-            <a:off x="310896" y="4654296"/>
+            <a:off x="310896" y="4572001"/>
             <a:ext cx="2532887" cy="365760"/>
           </a:xfrm>
           <a:prstGeom prst="rect">
@@ -5343,7 +5160,7 @@
         </p:nvSpPr>
         <p:spPr>
           <a:xfrm>
-            <a:off x="292608" y="5102352"/>
+            <a:off x="329184" y="5637275"/>
             <a:ext cx="2587751" cy="237744"/>
           </a:xfrm>
           <a:prstGeom prst="rect">
@@ -5352,7 +5169,7 @@
           <a:noFill/>
         </p:spPr>
         <p:txBody>
-          <a:bodyPr wrap="square" lIns="36576" rIns="36576" tIns="18288" bIns="18288" anchor="t">
+          <a:bodyPr wrap="square" lIns="36576" tIns="18288" rIns="36576" bIns="18288" anchor="t">
             <a:spAutoFit/>
           </a:bodyPr>
           <a:lstStyle/>
@@ -5445,6 +5262,7 @@
           <a:lstStyle/>
           <a:p>
             <a:pPr algn="ctr"/>
+            <a:endParaRPr/>
           </a:p>
         </p:txBody>
       </p:sp>
@@ -5492,6 +5310,7 @@
           <a:lstStyle/>
           <a:p>
             <a:pPr algn="ctr"/>
+            <a:endParaRPr/>
           </a:p>
         </p:txBody>
       </p:sp>
@@ -5535,6 +5354,7 @@
           <a:lstStyle/>
           <a:p>
             <a:pPr algn="ctr"/>
+            <a:endParaRPr/>
           </a:p>
         </p:txBody>
       </p:sp>
@@ -5578,6 +5398,7 @@
           <a:lstStyle/>
           <a:p>
             <a:pPr algn="ctr"/>
+            <a:endParaRPr/>
           </a:p>
         </p:txBody>
       </p:sp>
@@ -5598,7 +5419,7 @@
           <a:noFill/>
         </p:spPr>
         <p:txBody>
-          <a:bodyPr wrap="square" lIns="36576" rIns="36576" tIns="18288" bIns="18288" anchor="t">
+          <a:bodyPr wrap="square" lIns="36576" tIns="18288" rIns="36576" bIns="18288" anchor="t">
             <a:spAutoFit/>
           </a:bodyPr>
           <a:lstStyle/>
@@ -5633,7 +5454,7 @@
           <a:noFill/>
         </p:spPr>
         <p:txBody>
-          <a:bodyPr wrap="square" lIns="36576" rIns="36576" tIns="18288" bIns="18288" anchor="t">
+          <a:bodyPr wrap="square" lIns="36576" tIns="18288" rIns="36576" bIns="18288" anchor="t">
             <a:spAutoFit/>
           </a:bodyPr>
           <a:lstStyle/>
@@ -5693,6 +5514,7 @@
           <a:lstStyle/>
           <a:p>
             <a:pPr algn="ctr"/>
+            <a:endParaRPr/>
           </a:p>
         </p:txBody>
       </p:sp>
@@ -5766,7 +5588,7 @@
           <a:noFill/>
         </p:spPr>
         <p:txBody>
-          <a:bodyPr wrap="square" lIns="36576" rIns="36576" tIns="18288" bIns="18288" anchor="t">
+          <a:bodyPr wrap="square" lIns="36576" tIns="18288" rIns="36576" bIns="18288" anchor="t">
             <a:spAutoFit/>
           </a:bodyPr>
           <a:lstStyle/>
@@ -5824,6 +5646,7 @@
           <a:lstStyle/>
           <a:p>
             <a:pPr algn="ctr"/>
+            <a:endParaRPr/>
           </a:p>
         </p:txBody>
       </p:sp>
@@ -5844,7 +5667,7 @@
           <a:noFill/>
         </p:spPr>
         <p:txBody>
-          <a:bodyPr wrap="square" lIns="36576" rIns="36576" tIns="18288" bIns="18288" anchor="t">
+          <a:bodyPr wrap="square" lIns="36576" tIns="18288" rIns="36576" bIns="18288" anchor="t">
             <a:spAutoFit/>
           </a:bodyPr>
           <a:lstStyle/>
@@ -5902,6 +5725,7 @@
           <a:lstStyle/>
           <a:p>
             <a:pPr algn="ctr"/>
+            <a:endParaRPr/>
           </a:p>
         </p:txBody>
       </p:sp>
@@ -5922,7 +5746,7 @@
           <a:noFill/>
         </p:spPr>
         <p:txBody>
-          <a:bodyPr wrap="square" lIns="36576" rIns="36576" tIns="18288" bIns="18288" anchor="t">
+          <a:bodyPr wrap="square" lIns="36576" tIns="18288" rIns="36576" bIns="18288" anchor="t">
             <a:spAutoFit/>
           </a:bodyPr>
           <a:lstStyle/>
@@ -5980,6 +5804,7 @@
           <a:lstStyle/>
           <a:p>
             <a:pPr algn="ctr"/>
+            <a:endParaRPr/>
           </a:p>
         </p:txBody>
       </p:sp>
@@ -6000,7 +5825,7 @@
           <a:noFill/>
         </p:spPr>
         <p:txBody>
-          <a:bodyPr wrap="square" lIns="36576" rIns="36576" tIns="18288" bIns="18288" anchor="t">
+          <a:bodyPr wrap="square" lIns="36576" tIns="18288" rIns="36576" bIns="18288" anchor="t">
             <a:spAutoFit/>
           </a:bodyPr>
           <a:lstStyle/>
@@ -6058,6 +5883,7 @@
           <a:lstStyle/>
           <a:p>
             <a:pPr algn="ctr"/>
+            <a:endParaRPr/>
           </a:p>
         </p:txBody>
       </p:sp>
@@ -6078,7 +5904,7 @@
           <a:noFill/>
         </p:spPr>
         <p:txBody>
-          <a:bodyPr wrap="square" lIns="36576" rIns="36576" tIns="18288" bIns="18288" anchor="t">
+          <a:bodyPr wrap="square" lIns="36576" tIns="18288" rIns="36576" bIns="18288" anchor="t">
             <a:spAutoFit/>
           </a:bodyPr>
           <a:lstStyle/>
@@ -6138,6 +5964,7 @@
           <a:lstStyle/>
           <a:p>
             <a:pPr algn="ctr"/>
+            <a:endParaRPr/>
           </a:p>
         </p:txBody>
       </p:sp>
@@ -6275,6 +6102,7 @@
           <a:lstStyle/>
           <a:p>
             <a:pPr algn="ctr"/>
+            <a:endParaRPr/>
           </a:p>
         </p:txBody>
       </p:sp>
@@ -6348,7 +6176,7 @@
           <a:noFill/>
         </p:spPr>
         <p:txBody>
-          <a:bodyPr wrap="square" lIns="36576" rIns="36576" tIns="18288" bIns="18288" anchor="t">
+          <a:bodyPr wrap="square" lIns="36576" tIns="18288" rIns="36576" bIns="18288" anchor="t">
             <a:spAutoFit/>
           </a:bodyPr>
           <a:lstStyle/>
@@ -6410,6 +6238,7 @@
           <a:lstStyle/>
           <a:p>
             <a:pPr algn="ctr"/>
+            <a:endParaRPr/>
           </a:p>
         </p:txBody>
       </p:sp>
@@ -6474,7 +6303,7 @@
         </p:nvSpPr>
         <p:spPr>
           <a:xfrm>
-            <a:off x="3246120" y="5102352"/>
+            <a:off x="3282696" y="5637275"/>
             <a:ext cx="2587751" cy="237744"/>
           </a:xfrm>
           <a:prstGeom prst="rect">
@@ -6483,7 +6312,7 @@
           <a:noFill/>
         </p:spPr>
         <p:txBody>
-          <a:bodyPr wrap="square" lIns="36576" rIns="36576" tIns="18288" bIns="18288" anchor="t">
+          <a:bodyPr wrap="square" lIns="36576" tIns="18288" rIns="36576" bIns="18288" anchor="t">
             <a:spAutoFit/>
           </a:bodyPr>
           <a:lstStyle/>
@@ -6576,6 +6405,7 @@
           <a:lstStyle/>
           <a:p>
             <a:pPr algn="ctr"/>
+            <a:endParaRPr/>
           </a:p>
         </p:txBody>
       </p:sp>
@@ -6623,6 +6453,7 @@
           <a:lstStyle/>
           <a:p>
             <a:pPr algn="ctr"/>
+            <a:endParaRPr/>
           </a:p>
         </p:txBody>
       </p:sp>
@@ -6666,6 +6497,7 @@
           <a:lstStyle/>
           <a:p>
             <a:pPr algn="ctr"/>
+            <a:endParaRPr/>
           </a:p>
         </p:txBody>
       </p:sp>
@@ -6709,6 +6541,7 @@
           <a:lstStyle/>
           <a:p>
             <a:pPr algn="ctr"/>
+            <a:endParaRPr/>
           </a:p>
         </p:txBody>
       </p:sp>
@@ -6729,7 +6562,7 @@
           <a:noFill/>
         </p:spPr>
         <p:txBody>
-          <a:bodyPr wrap="square" lIns="36576" rIns="36576" tIns="18288" bIns="18288" anchor="t">
+          <a:bodyPr wrap="square" lIns="36576" tIns="18288" rIns="36576" bIns="18288" anchor="t">
             <a:spAutoFit/>
           </a:bodyPr>
           <a:lstStyle/>
@@ -6764,7 +6597,7 @@
           <a:noFill/>
         </p:spPr>
         <p:txBody>
-          <a:bodyPr wrap="square" lIns="36576" rIns="36576" tIns="18288" bIns="18288" anchor="t">
+          <a:bodyPr wrap="square" lIns="36576" tIns="18288" rIns="36576" bIns="18288" anchor="t">
             <a:spAutoFit/>
           </a:bodyPr>
           <a:lstStyle/>
@@ -6824,6 +6657,7 @@
           <a:lstStyle/>
           <a:p>
             <a:pPr algn="ctr"/>
+            <a:endParaRPr/>
           </a:p>
         </p:txBody>
       </p:sp>
@@ -6897,7 +6731,7 @@
           <a:noFill/>
         </p:spPr>
         <p:txBody>
-          <a:bodyPr wrap="square" lIns="36576" rIns="36576" tIns="18288" bIns="18288" anchor="t">
+          <a:bodyPr wrap="square" lIns="36576" tIns="18288" rIns="36576" bIns="18288" anchor="t">
             <a:spAutoFit/>
           </a:bodyPr>
           <a:lstStyle/>
@@ -6955,6 +6789,7 @@
           <a:lstStyle/>
           <a:p>
             <a:pPr algn="ctr"/>
+            <a:endParaRPr/>
           </a:p>
         </p:txBody>
       </p:sp>
@@ -6975,7 +6810,7 @@
           <a:noFill/>
         </p:spPr>
         <p:txBody>
-          <a:bodyPr wrap="square" lIns="36576" rIns="36576" tIns="18288" bIns="18288" anchor="t">
+          <a:bodyPr wrap="square" lIns="36576" tIns="18288" rIns="36576" bIns="18288" anchor="t">
             <a:spAutoFit/>
           </a:bodyPr>
           <a:lstStyle/>
@@ -7033,6 +6868,7 @@
           <a:lstStyle/>
           <a:p>
             <a:pPr algn="ctr"/>
+            <a:endParaRPr/>
           </a:p>
         </p:txBody>
       </p:sp>
@@ -7053,7 +6889,7 @@
           <a:noFill/>
         </p:spPr>
         <p:txBody>
-          <a:bodyPr wrap="square" lIns="36576" rIns="36576" tIns="18288" bIns="18288" anchor="t">
+          <a:bodyPr wrap="square" lIns="36576" tIns="18288" rIns="36576" bIns="18288" anchor="t">
             <a:spAutoFit/>
           </a:bodyPr>
           <a:lstStyle/>
@@ -7111,6 +6947,7 @@
           <a:lstStyle/>
           <a:p>
             <a:pPr algn="ctr"/>
+            <a:endParaRPr/>
           </a:p>
         </p:txBody>
       </p:sp>
@@ -7131,7 +6968,7 @@
           <a:noFill/>
         </p:spPr>
         <p:txBody>
-          <a:bodyPr wrap="square" lIns="36576" rIns="36576" tIns="18288" bIns="18288" anchor="t">
+          <a:bodyPr wrap="square" lIns="36576" tIns="18288" rIns="36576" bIns="18288" anchor="t">
             <a:spAutoFit/>
           </a:bodyPr>
           <a:lstStyle/>
@@ -7189,6 +7026,7 @@
           <a:lstStyle/>
           <a:p>
             <a:pPr algn="ctr"/>
+            <a:endParaRPr/>
           </a:p>
         </p:txBody>
       </p:sp>
@@ -7209,7 +7047,7 @@
           <a:noFill/>
         </p:spPr>
         <p:txBody>
-          <a:bodyPr wrap="square" lIns="36576" rIns="36576" tIns="18288" bIns="18288" anchor="t">
+          <a:bodyPr wrap="square" lIns="36576" tIns="18288" rIns="36576" bIns="18288" anchor="t">
             <a:spAutoFit/>
           </a:bodyPr>
           <a:lstStyle/>
@@ -7269,6 +7107,7 @@
           <a:lstStyle/>
           <a:p>
             <a:pPr algn="ctr"/>
+            <a:endParaRPr/>
           </a:p>
         </p:txBody>
       </p:sp>
@@ -7406,6 +7245,7 @@
           <a:lstStyle/>
           <a:p>
             <a:pPr algn="ctr"/>
+            <a:endParaRPr/>
           </a:p>
         </p:txBody>
       </p:sp>
@@ -7479,7 +7319,7 @@
           <a:noFill/>
         </p:spPr>
         <p:txBody>
-          <a:bodyPr wrap="square" lIns="36576" rIns="36576" tIns="18288" bIns="18288" anchor="t">
+          <a:bodyPr wrap="square" lIns="36576" tIns="18288" rIns="36576" bIns="18288" anchor="t">
             <a:spAutoFit/>
           </a:bodyPr>
           <a:lstStyle/>
@@ -7541,6 +7381,7 @@
           <a:lstStyle/>
           <a:p>
             <a:pPr algn="ctr"/>
+            <a:endParaRPr/>
           </a:p>
         </p:txBody>
       </p:sp>
@@ -7605,7 +7446,7 @@
         </p:nvSpPr>
         <p:spPr>
           <a:xfrm>
-            <a:off x="6199632" y="5102352"/>
+            <a:off x="6236208" y="5637275"/>
             <a:ext cx="2587751" cy="237744"/>
           </a:xfrm>
           <a:prstGeom prst="rect">
@@ -7614,7 +7455,7 @@
           <a:noFill/>
         </p:spPr>
         <p:txBody>
-          <a:bodyPr wrap="square" lIns="36576" rIns="36576" tIns="18288" bIns="18288" anchor="t">
+          <a:bodyPr wrap="square" lIns="36576" tIns="18288" rIns="36576" bIns="18288" anchor="t">
             <a:spAutoFit/>
           </a:bodyPr>
           <a:lstStyle/>
@@ -7640,7 +7481,7 @@
         </p:nvSpPr>
         <p:spPr>
           <a:xfrm>
-            <a:off x="6181344" y="5358384"/>
+            <a:off x="6199632" y="5112322"/>
             <a:ext cx="2606039" cy="237744"/>
           </a:xfrm>
           <a:prstGeom prst="roundRect">
@@ -7676,6 +7517,7 @@
           <a:lstStyle/>
           <a:p>
             <a:pPr algn="ctr"/>
+            <a:endParaRPr/>
           </a:p>
         </p:txBody>
       </p:sp>
@@ -7687,7 +7529,7 @@
         </p:nvSpPr>
         <p:spPr>
           <a:xfrm>
-            <a:off x="6217920" y="5376672"/>
+            <a:off x="6199632" y="5149871"/>
             <a:ext cx="2532887" cy="219456"/>
           </a:xfrm>
           <a:prstGeom prst="rect">
@@ -7696,7 +7538,7 @@
           <a:noFill/>
         </p:spPr>
         <p:txBody>
-          <a:bodyPr wrap="square" lIns="36576" rIns="36576" tIns="18288" bIns="18288" anchor="t">
+          <a:bodyPr wrap="square" lIns="36576" tIns="18288" rIns="36576" bIns="18288" anchor="t">
             <a:spAutoFit/>
           </a:bodyPr>
           <a:lstStyle/>
@@ -7709,6 +7551,7 @@
               </a:defRPr>
             </a:pPr>
             <a:r>
+              <a:rPr dirty="0"/>
               <a:t>⚠  CRITICAL PATH — drives total runtime</a:t>
             </a:r>
           </a:p>
@@ -7789,6 +7632,7 @@
           <a:lstStyle/>
           <a:p>
             <a:pPr algn="ctr"/>
+            <a:endParaRPr/>
           </a:p>
         </p:txBody>
       </p:sp>
@@ -7836,6 +7680,7 @@
           <a:lstStyle/>
           <a:p>
             <a:pPr algn="ctr"/>
+            <a:endParaRPr/>
           </a:p>
         </p:txBody>
       </p:sp>
@@ -7879,6 +7724,7 @@
           <a:lstStyle/>
           <a:p>
             <a:pPr algn="ctr"/>
+            <a:endParaRPr/>
           </a:p>
         </p:txBody>
       </p:sp>
@@ -7922,6 +7768,7 @@
           <a:lstStyle/>
           <a:p>
             <a:pPr algn="ctr"/>
+            <a:endParaRPr/>
           </a:p>
         </p:txBody>
       </p:sp>
@@ -7942,7 +7789,7 @@
           <a:noFill/>
         </p:spPr>
         <p:txBody>
-          <a:bodyPr wrap="square" lIns="36576" rIns="36576" tIns="18288" bIns="18288" anchor="t">
+          <a:bodyPr wrap="square" lIns="36576" tIns="18288" rIns="36576" bIns="18288" anchor="t">
             <a:spAutoFit/>
           </a:bodyPr>
           <a:lstStyle/>
@@ -7977,7 +7824,7 @@
           <a:noFill/>
         </p:spPr>
         <p:txBody>
-          <a:bodyPr wrap="square" lIns="36576" rIns="36576" tIns="18288" bIns="18288" anchor="t">
+          <a:bodyPr wrap="square" lIns="36576" tIns="18288" rIns="36576" bIns="18288" anchor="t">
             <a:spAutoFit/>
           </a:bodyPr>
           <a:lstStyle/>
@@ -8037,6 +7884,7 @@
           <a:lstStyle/>
           <a:p>
             <a:pPr algn="ctr"/>
+            <a:endParaRPr/>
           </a:p>
         </p:txBody>
       </p:sp>
@@ -8110,7 +7958,7 @@
           <a:noFill/>
         </p:spPr>
         <p:txBody>
-          <a:bodyPr wrap="square" lIns="36576" rIns="36576" tIns="18288" bIns="18288" anchor="t">
+          <a:bodyPr wrap="square" lIns="36576" tIns="18288" rIns="36576" bIns="18288" anchor="t">
             <a:spAutoFit/>
           </a:bodyPr>
           <a:lstStyle/>
@@ -8168,6 +8016,7 @@
           <a:lstStyle/>
           <a:p>
             <a:pPr algn="ctr"/>
+            <a:endParaRPr/>
           </a:p>
         </p:txBody>
       </p:sp>
@@ -8188,7 +8037,7 @@
           <a:noFill/>
         </p:spPr>
         <p:txBody>
-          <a:bodyPr wrap="square" lIns="36576" rIns="36576" tIns="18288" bIns="18288" anchor="t">
+          <a:bodyPr wrap="square" lIns="36576" tIns="18288" rIns="36576" bIns="18288" anchor="t">
             <a:spAutoFit/>
           </a:bodyPr>
           <a:lstStyle/>
@@ -8246,6 +8095,7 @@
           <a:lstStyle/>
           <a:p>
             <a:pPr algn="ctr"/>
+            <a:endParaRPr/>
           </a:p>
         </p:txBody>
       </p:sp>
@@ -8266,7 +8116,7 @@
           <a:noFill/>
         </p:spPr>
         <p:txBody>
-          <a:bodyPr wrap="square" lIns="36576" rIns="36576" tIns="18288" bIns="18288" anchor="t">
+          <a:bodyPr wrap="square" lIns="36576" tIns="18288" rIns="36576" bIns="18288" anchor="t">
             <a:spAutoFit/>
           </a:bodyPr>
           <a:lstStyle/>
@@ -8324,6 +8174,7 @@
           <a:lstStyle/>
           <a:p>
             <a:pPr algn="ctr"/>
+            <a:endParaRPr/>
           </a:p>
         </p:txBody>
       </p:sp>
@@ -8344,7 +8195,7 @@
           <a:noFill/>
         </p:spPr>
         <p:txBody>
-          <a:bodyPr wrap="square" lIns="36576" rIns="36576" tIns="18288" bIns="18288" anchor="t">
+          <a:bodyPr wrap="square" lIns="36576" tIns="18288" rIns="36576" bIns="18288" anchor="t">
             <a:spAutoFit/>
           </a:bodyPr>
           <a:lstStyle/>
@@ -8402,6 +8253,7 @@
           <a:lstStyle/>
           <a:p>
             <a:pPr algn="ctr"/>
+            <a:endParaRPr/>
           </a:p>
         </p:txBody>
       </p:sp>
@@ -8422,7 +8274,7 @@
           <a:noFill/>
         </p:spPr>
         <p:txBody>
-          <a:bodyPr wrap="square" lIns="36576" rIns="36576" tIns="18288" bIns="18288" anchor="t">
+          <a:bodyPr wrap="square" lIns="36576" tIns="18288" rIns="36576" bIns="18288" anchor="t">
             <a:spAutoFit/>
           </a:bodyPr>
           <a:lstStyle/>
@@ -8482,6 +8334,7 @@
           <a:lstStyle/>
           <a:p>
             <a:pPr algn="ctr"/>
+            <a:endParaRPr/>
           </a:p>
         </p:txBody>
       </p:sp>
@@ -8619,6 +8472,7 @@
           <a:lstStyle/>
           <a:p>
             <a:pPr algn="ctr"/>
+            <a:endParaRPr/>
           </a:p>
         </p:txBody>
       </p:sp>
@@ -8692,7 +8546,7 @@
           <a:noFill/>
         </p:spPr>
         <p:txBody>
-          <a:bodyPr wrap="square" lIns="36576" rIns="36576" tIns="18288" bIns="18288" anchor="t">
+          <a:bodyPr wrap="square" lIns="36576" tIns="18288" rIns="36576" bIns="18288" anchor="t">
             <a:spAutoFit/>
           </a:bodyPr>
           <a:lstStyle/>
@@ -8754,6 +8608,7 @@
           <a:lstStyle/>
           <a:p>
             <a:pPr algn="ctr"/>
+            <a:endParaRPr/>
           </a:p>
         </p:txBody>
       </p:sp>
@@ -8818,7 +8673,7 @@
         </p:nvSpPr>
         <p:spPr>
           <a:xfrm>
-            <a:off x="9153143" y="5102352"/>
+            <a:off x="9189719" y="5637275"/>
             <a:ext cx="2587751" cy="237744"/>
           </a:xfrm>
           <a:prstGeom prst="rect">
@@ -8827,7 +8682,7 @@
           <a:noFill/>
         </p:spPr>
         <p:txBody>
-          <a:bodyPr wrap="square" lIns="36576" rIns="36576" tIns="18288" bIns="18288" anchor="t">
+          <a:bodyPr wrap="square" lIns="36576" tIns="18288" rIns="36576" bIns="18288" anchor="t">
             <a:spAutoFit/>
           </a:bodyPr>
           <a:lstStyle/>
@@ -8853,7 +8708,7 @@
         </p:nvSpPr>
         <p:spPr>
           <a:xfrm>
-            <a:off x="219456" y="5138927"/>
+            <a:off x="256032" y="5673850"/>
             <a:ext cx="274320" cy="329184"/>
           </a:xfrm>
           <a:prstGeom prst="rect">
@@ -8885,6 +8740,7 @@
           <a:lstStyle/>
           <a:p>
             <a:pPr algn="ctr"/>
+            <a:endParaRPr/>
           </a:p>
         </p:txBody>
       </p:sp>
@@ -8905,7 +8761,7 @@
           <a:noFill/>
         </p:spPr>
         <p:txBody>
-          <a:bodyPr wrap="square" lIns="36576" rIns="36576" tIns="18288" bIns="18288" anchor="t">
+          <a:bodyPr wrap="square" lIns="36576" tIns="18288" rIns="36576" bIns="18288" anchor="t">
             <a:spAutoFit/>
           </a:bodyPr>
           <a:lstStyle/>
@@ -8931,7 +8787,7 @@
         </p:nvSpPr>
         <p:spPr>
           <a:xfrm>
-            <a:off x="493776" y="5138927"/>
+            <a:off x="530352" y="5673850"/>
             <a:ext cx="502920" cy="329184"/>
           </a:xfrm>
           <a:prstGeom prst="rect">
@@ -8963,6 +8819,7 @@
           <a:lstStyle/>
           <a:p>
             <a:pPr algn="ctr"/>
+            <a:endParaRPr/>
           </a:p>
         </p:txBody>
       </p:sp>
@@ -8983,7 +8840,7 @@
           <a:noFill/>
         </p:spPr>
         <p:txBody>
-          <a:bodyPr wrap="square" lIns="36576" rIns="36576" tIns="18288" bIns="18288" anchor="t">
+          <a:bodyPr wrap="square" lIns="36576" tIns="18288" rIns="36576" bIns="18288" anchor="t">
             <a:spAutoFit/>
           </a:bodyPr>
           <a:lstStyle/>
@@ -9009,7 +8866,7 @@
         </p:nvSpPr>
         <p:spPr>
           <a:xfrm>
-            <a:off x="996696" y="5138927"/>
+            <a:off x="1033272" y="5673850"/>
             <a:ext cx="10607040" cy="329184"/>
           </a:xfrm>
           <a:prstGeom prst="rect">
@@ -9041,6 +8898,7 @@
           <a:lstStyle/>
           <a:p>
             <a:pPr algn="ctr"/>
+            <a:endParaRPr/>
           </a:p>
         </p:txBody>
       </p:sp>
@@ -9052,7 +8910,7 @@
         </p:nvSpPr>
         <p:spPr>
           <a:xfrm>
-            <a:off x="1069848" y="5202936"/>
+            <a:off x="1106424" y="5737859"/>
             <a:ext cx="10497312" cy="219456"/>
           </a:xfrm>
           <a:prstGeom prst="rect">
@@ -9061,7 +8919,7 @@
           <a:noFill/>
         </p:spPr>
         <p:txBody>
-          <a:bodyPr wrap="square" lIns="36576" rIns="36576" tIns="18288" bIns="18288" anchor="t">
+          <a:bodyPr wrap="square" lIns="36576" tIns="18288" rIns="36576" bIns="18288" anchor="t">
             <a:spAutoFit/>
           </a:bodyPr>
           <a:lstStyle/>
@@ -9087,7 +8945,7 @@
         </p:nvSpPr>
         <p:spPr>
           <a:xfrm>
-            <a:off x="11603736" y="5138927"/>
+            <a:off x="11640312" y="5673850"/>
             <a:ext cx="365760" cy="329184"/>
           </a:xfrm>
           <a:prstGeom prst="rect">
@@ -9119,6 +8977,7 @@
           <a:lstStyle/>
           <a:p>
             <a:pPr algn="ctr"/>
+            <a:endParaRPr/>
           </a:p>
         </p:txBody>
       </p:sp>
@@ -9139,7 +8998,7 @@
           <a:noFill/>
         </p:spPr>
         <p:txBody>
-          <a:bodyPr wrap="square" lIns="36576" rIns="36576" tIns="18288" bIns="18288" anchor="t">
+          <a:bodyPr wrap="square" lIns="36576" tIns="18288" rIns="36576" bIns="18288" anchor="t">
             <a:spAutoFit/>
           </a:bodyPr>
           <a:lstStyle/>
@@ -9165,7 +9024,7 @@
         </p:nvSpPr>
         <p:spPr>
           <a:xfrm>
-            <a:off x="219456" y="4937759"/>
+            <a:off x="292608" y="4864608"/>
             <a:ext cx="5486400" cy="182880"/>
           </a:xfrm>
           <a:prstGeom prst="rect">
@@ -9174,7 +9033,7 @@
           <a:noFill/>
         </p:spPr>
         <p:txBody>
-          <a:bodyPr wrap="square" lIns="36576" rIns="36576" tIns="18288" bIns="18288" anchor="t">
+          <a:bodyPr wrap="square" lIns="36576" tIns="18288" rIns="36576" bIns="18288" anchor="t">
             <a:spAutoFit/>
           </a:bodyPr>
           <a:lstStyle/>
@@ -9209,7 +9068,7 @@
           <a:noFill/>
         </p:spPr>
         <p:txBody>
-          <a:bodyPr wrap="square" lIns="36576" rIns="36576" tIns="18288" bIns="18288" anchor="t">
+          <a:bodyPr wrap="square" lIns="36576" tIns="18288" rIns="36576" bIns="18288" anchor="t">
             <a:spAutoFit/>
           </a:bodyPr>
           <a:lstStyle/>
@@ -9235,7 +9094,7 @@
         </p:nvSpPr>
         <p:spPr>
           <a:xfrm>
-            <a:off x="219456" y="5724143"/>
+            <a:off x="274320" y="6373366"/>
             <a:ext cx="1828800" cy="310896"/>
           </a:xfrm>
           <a:prstGeom prst="roundRect">
@@ -9271,6 +9130,7 @@
           <a:lstStyle/>
           <a:p>
             <a:pPr algn="ctr"/>
+            <a:endParaRPr/>
           </a:p>
         </p:txBody>
       </p:sp>
@@ -9282,7 +9142,7 @@
         </p:nvSpPr>
         <p:spPr>
           <a:xfrm>
-            <a:off x="265176" y="5742431"/>
+            <a:off x="320040" y="6391654"/>
             <a:ext cx="1737360" cy="274320"/>
           </a:xfrm>
           <a:prstGeom prst="rect">
@@ -9291,7 +9151,7 @@
           <a:noFill/>
         </p:spPr>
         <p:txBody>
-          <a:bodyPr wrap="square" lIns="36576" rIns="36576" tIns="18288" bIns="18288" anchor="t">
+          <a:bodyPr wrap="square" lIns="36576" tIns="18288" rIns="36576" bIns="18288" anchor="t">
             <a:spAutoFit/>
           </a:bodyPr>
           <a:lstStyle/>
@@ -9317,7 +9177,7 @@
         </p:nvSpPr>
         <p:spPr>
           <a:xfrm>
-            <a:off x="2176272" y="5724143"/>
+            <a:off x="2231136" y="6373366"/>
             <a:ext cx="1920240" cy="310896"/>
           </a:xfrm>
           <a:prstGeom prst="roundRect">
@@ -9353,6 +9213,7 @@
           <a:lstStyle/>
           <a:p>
             <a:pPr algn="ctr"/>
+            <a:endParaRPr/>
           </a:p>
         </p:txBody>
       </p:sp>
@@ -9364,7 +9225,7 @@
         </p:nvSpPr>
         <p:spPr>
           <a:xfrm>
-            <a:off x="2221991" y="5742431"/>
+            <a:off x="2276855" y="6391654"/>
             <a:ext cx="1828800" cy="274320"/>
           </a:xfrm>
           <a:prstGeom prst="rect">
@@ -9373,7 +9234,7 @@
           <a:noFill/>
         </p:spPr>
         <p:txBody>
-          <a:bodyPr wrap="square" lIns="36576" rIns="36576" tIns="18288" bIns="18288" anchor="t">
+          <a:bodyPr wrap="square" lIns="36576" tIns="18288" rIns="36576" bIns="18288" anchor="t">
             <a:spAutoFit/>
           </a:bodyPr>
           <a:lstStyle/>
@@ -9399,7 +9260,7 @@
         </p:nvSpPr>
         <p:spPr>
           <a:xfrm>
-            <a:off x="4187952" y="5724143"/>
+            <a:off x="4242816" y="6373366"/>
             <a:ext cx="1920240" cy="310896"/>
           </a:xfrm>
           <a:prstGeom prst="roundRect">
@@ -9435,6 +9296,7 @@
           <a:lstStyle/>
           <a:p>
             <a:pPr algn="ctr"/>
+            <a:endParaRPr/>
           </a:p>
         </p:txBody>
       </p:sp>
@@ -9446,7 +9308,7 @@
         </p:nvSpPr>
         <p:spPr>
           <a:xfrm>
-            <a:off x="4233672" y="5742431"/>
+            <a:off x="4288536" y="6391654"/>
             <a:ext cx="1828800" cy="274320"/>
           </a:xfrm>
           <a:prstGeom prst="rect">
@@ -9455,7 +9317,7 @@
           <a:noFill/>
         </p:spPr>
         <p:txBody>
-          <a:bodyPr wrap="square" lIns="36576" rIns="36576" tIns="18288" bIns="18288" anchor="t">
+          <a:bodyPr wrap="square" lIns="36576" tIns="18288" rIns="36576" bIns="18288" anchor="t">
             <a:spAutoFit/>
           </a:bodyPr>
           <a:lstStyle/>
@@ -9481,7 +9343,7 @@
         </p:nvSpPr>
         <p:spPr>
           <a:xfrm>
-            <a:off x="6199632" y="5724143"/>
+            <a:off x="6254496" y="6373366"/>
             <a:ext cx="1920240" cy="310896"/>
           </a:xfrm>
           <a:prstGeom prst="roundRect">
@@ -9517,6 +9379,7 @@
           <a:lstStyle/>
           <a:p>
             <a:pPr algn="ctr"/>
+            <a:endParaRPr/>
           </a:p>
         </p:txBody>
       </p:sp>
@@ -9528,7 +9391,7 @@
         </p:nvSpPr>
         <p:spPr>
           <a:xfrm>
-            <a:off x="6245352" y="5742431"/>
+            <a:off x="6300216" y="6391654"/>
             <a:ext cx="1828800" cy="274320"/>
           </a:xfrm>
           <a:prstGeom prst="rect">
@@ -9537,7 +9400,7 @@
           <a:noFill/>
         </p:spPr>
         <p:txBody>
-          <a:bodyPr wrap="square" lIns="36576" rIns="36576" tIns="18288" bIns="18288" anchor="t">
+          <a:bodyPr wrap="square" lIns="36576" tIns="18288" rIns="36576" bIns="18288" anchor="t">
             <a:spAutoFit/>
           </a:bodyPr>
           <a:lstStyle/>
@@ -9563,7 +9426,7 @@
         </p:nvSpPr>
         <p:spPr>
           <a:xfrm>
-            <a:off x="8211312" y="5724143"/>
+            <a:off x="8266176" y="6373366"/>
             <a:ext cx="2148840" cy="310896"/>
           </a:xfrm>
           <a:prstGeom prst="roundRect">
@@ -9599,6 +9462,7 @@
           <a:lstStyle/>
           <a:p>
             <a:pPr algn="ctr"/>
+            <a:endParaRPr/>
           </a:p>
         </p:txBody>
       </p:sp>
@@ -9610,7 +9474,7 @@
         </p:nvSpPr>
         <p:spPr>
           <a:xfrm>
-            <a:off x="8257032" y="5742431"/>
+            <a:off x="8311896" y="6391654"/>
             <a:ext cx="2057400" cy="274320"/>
           </a:xfrm>
           <a:prstGeom prst="rect">
@@ -9619,7 +9483,7 @@
           <a:noFill/>
         </p:spPr>
         <p:txBody>
-          <a:bodyPr wrap="square" lIns="36576" rIns="36576" tIns="18288" bIns="18288" anchor="t">
+          <a:bodyPr wrap="square" lIns="36576" tIns="18288" rIns="36576" bIns="18288" anchor="t">
             <a:spAutoFit/>
           </a:bodyPr>
           <a:lstStyle/>
@@ -9654,7 +9518,7 @@
           <a:noFill/>
         </p:spPr>
         <p:txBody>
-          <a:bodyPr wrap="square" lIns="36576" rIns="36576" tIns="18288" bIns="18288" anchor="t">
+          <a:bodyPr wrap="square" lIns="36576" tIns="18288" rIns="36576" bIns="18288" anchor="t">
             <a:spAutoFit/>
           </a:bodyPr>
           <a:lstStyle/>
@@ -9681,7 +9545,7 @@
 </file>
 
 <file path=ppt/slides/slide2.xml><?xml version="1.0" encoding="utf-8"?>
-<p:sld xmlns:a="http://schemas.openxmlformats.org/drawingml/2006/main" xmlns:p="http://schemas.openxmlformats.org/presentationml/2006/main" xmlns:r="http://schemas.openxmlformats.org/officeDocument/2006/relationships">
+<p:sld xmlns:a="http://schemas.openxmlformats.org/drawingml/2006/main" xmlns:r="http://schemas.openxmlformats.org/officeDocument/2006/relationships" xmlns:p="http://schemas.openxmlformats.org/presentationml/2006/main">
   <p:cSld>
     <p:bg>
       <p:bgPr>
@@ -9697,7 +9561,14 @@
         <p:cNvGrpSpPr/>
         <p:nvPr/>
       </p:nvGrpSpPr>
-      <p:grpSpPr/>
+      <p:grpSpPr>
+        <a:xfrm>
+          <a:off x="0" y="0"/>
+          <a:ext cx="0" cy="0"/>
+          <a:chOff x="0" y="0"/>
+          <a:chExt cx="0" cy="0"/>
+        </a:xfrm>
+      </p:grpSpPr>
       <p:sp>
         <p:nvSpPr>
           <p:cNvPr id="2" name="Rectangle 1"/>
@@ -9738,6 +9609,7 @@
           <a:lstStyle/>
           <a:p>
             <a:pPr algn="ctr"/>
+            <a:endParaRPr/>
           </a:p>
         </p:txBody>
       </p:sp>
@@ -9781,6 +9653,7 @@
           <a:lstStyle/>
           <a:p>
             <a:pPr algn="ctr"/>
+            <a:endParaRPr/>
           </a:p>
         </p:txBody>
       </p:sp>
@@ -9824,6 +9697,7 @@
           <a:lstStyle/>
           <a:p>
             <a:pPr algn="ctr"/>
+            <a:endParaRPr/>
           </a:p>
         </p:txBody>
       </p:sp>
@@ -9867,6 +9741,7 @@
           <a:lstStyle/>
           <a:p>
             <a:pPr algn="ctr"/>
+            <a:endParaRPr/>
           </a:p>
         </p:txBody>
       </p:sp>
@@ -9910,6 +9785,7 @@
           <a:lstStyle/>
           <a:p>
             <a:pPr algn="ctr"/>
+            <a:endParaRPr/>
           </a:p>
         </p:txBody>
       </p:sp>
@@ -9930,7 +9806,7 @@
           <a:noFill/>
         </p:spPr>
         <p:txBody>
-          <a:bodyPr wrap="square" lIns="36576" rIns="36576" tIns="18288" bIns="18288" anchor="t">
+          <a:bodyPr wrap="square" lIns="36576" tIns="18288" rIns="36576" bIns="18288" anchor="t">
             <a:spAutoFit/>
           </a:bodyPr>
           <a:lstStyle/>
@@ -9965,7 +9841,7 @@
           <a:noFill/>
         </p:spPr>
         <p:txBody>
-          <a:bodyPr wrap="square" lIns="36576" rIns="36576" tIns="18288" bIns="18288" anchor="t">
+          <a:bodyPr wrap="square" lIns="36576" tIns="18288" rIns="36576" bIns="18288" anchor="t">
             <a:spAutoFit/>
           </a:bodyPr>
           <a:lstStyle/>
@@ -10027,6 +9903,7 @@
           <a:lstStyle/>
           <a:p>
             <a:pPr algn="ctr"/>
+            <a:endParaRPr/>
           </a:p>
         </p:txBody>
       </p:sp>
@@ -10047,7 +9924,7 @@
           <a:noFill/>
         </p:spPr>
         <p:txBody>
-          <a:bodyPr wrap="square" lIns="36576" rIns="36576" tIns="18288" bIns="18288" anchor="t">
+          <a:bodyPr wrap="square" lIns="36576" tIns="18288" rIns="36576" bIns="18288" anchor="t">
             <a:spAutoFit/>
           </a:bodyPr>
           <a:lstStyle/>
@@ -10109,6 +9986,7 @@
           <a:lstStyle/>
           <a:p>
             <a:pPr algn="ctr"/>
+            <a:endParaRPr/>
           </a:p>
         </p:txBody>
       </p:sp>
@@ -10129,7 +10007,7 @@
           <a:noFill/>
         </p:spPr>
         <p:txBody>
-          <a:bodyPr wrap="square" lIns="36576" rIns="36576" tIns="18288" bIns="18288" anchor="t">
+          <a:bodyPr wrap="square" lIns="36576" tIns="18288" rIns="36576" bIns="18288" anchor="t">
             <a:spAutoFit/>
           </a:bodyPr>
           <a:lstStyle/>
@@ -10191,6 +10069,7 @@
           <a:lstStyle/>
           <a:p>
             <a:pPr algn="ctr"/>
+            <a:endParaRPr/>
           </a:p>
         </p:txBody>
       </p:sp>
@@ -10211,7 +10090,7 @@
           <a:noFill/>
         </p:spPr>
         <p:txBody>
-          <a:bodyPr wrap="square" lIns="36576" rIns="36576" tIns="18288" bIns="18288" anchor="t">
+          <a:bodyPr wrap="square" lIns="36576" tIns="18288" rIns="36576" bIns="18288" anchor="t">
             <a:spAutoFit/>
           </a:bodyPr>
           <a:lstStyle/>
@@ -10273,6 +10152,7 @@
           <a:lstStyle/>
           <a:p>
             <a:pPr algn="ctr"/>
+            <a:endParaRPr/>
           </a:p>
         </p:txBody>
       </p:sp>
@@ -10293,7 +10173,7 @@
           <a:noFill/>
         </p:spPr>
         <p:txBody>
-          <a:bodyPr wrap="square" lIns="36576" rIns="36576" tIns="18288" bIns="18288" anchor="t">
+          <a:bodyPr wrap="square" lIns="36576" tIns="18288" rIns="36576" bIns="18288" anchor="t">
             <a:spAutoFit/>
           </a:bodyPr>
           <a:lstStyle/>
@@ -10355,6 +10235,7 @@
           <a:lstStyle/>
           <a:p>
             <a:pPr algn="ctr"/>
+            <a:endParaRPr/>
           </a:p>
         </p:txBody>
       </p:sp>
@@ -10463,7 +10344,7 @@
           <a:noFill/>
         </p:spPr>
         <p:txBody>
-          <a:bodyPr wrap="square" lIns="36576" rIns="36576" tIns="18288" bIns="18288" anchor="t">
+          <a:bodyPr wrap="square" lIns="36576" tIns="18288" rIns="36576" bIns="18288" anchor="t">
             <a:spAutoFit/>
           </a:bodyPr>
           <a:lstStyle/>
@@ -10525,6 +10406,7 @@
           <a:lstStyle/>
           <a:p>
             <a:pPr algn="ctr"/>
+            <a:endParaRPr/>
           </a:p>
         </p:txBody>
       </p:sp>
@@ -10537,7 +10419,7 @@
         <p:spPr>
           <a:xfrm>
             <a:off x="795528" y="1883664"/>
-            <a:ext cx="6492240" cy="585216"/>
+            <a:ext cx="6492240" cy="379078"/>
           </a:xfrm>
           <a:prstGeom prst="rect">
             <a:avLst/>
@@ -10561,6 +10443,7 @@
               </a:defRPr>
             </a:pPr>
             <a:r>
+              <a:rPr dirty="0"/>
               <a:t>Stage 0 — Change Detection  (~40 sec)</a:t>
             </a:r>
           </a:p>
@@ -10576,7 +10459,16 @@
               </a:defRPr>
             </a:pPr>
             <a:r>
-              <a:t>Scan 25 changed workspaces  ·  Compare MD5 content hashes  ·  Identify 500 changed artifacts  ·  180 unchanged per WS → SKIP</a:t>
+              <a:rPr dirty="0"/>
+              <a:t>Scan 25 changed workspaces  ·  Compare </a:t>
+            </a:r>
+            <a:r>
+              <a:rPr lang="en-US" dirty="0"/>
+              <a:t>SHA 256</a:t>
+            </a:r>
+            <a:r>
+              <a:rPr dirty="0"/>
+              <a:t> content hashes  ·  Identify 500 changed artifacts  ·  180 unchanged per WS → SKIP</a:t>
             </a:r>
           </a:p>
         </p:txBody>
@@ -10659,6 +10551,7 @@
           <a:lstStyle/>
           <a:p>
             <a:pPr algn="ctr"/>
+            <a:endParaRPr/>
           </a:p>
         </p:txBody>
       </p:sp>
@@ -10679,7 +10572,7 @@
           <a:noFill/>
         </p:spPr>
         <p:txBody>
-          <a:bodyPr wrap="square" lIns="36576" rIns="36576" tIns="18288" bIns="18288" anchor="t">
+          <a:bodyPr wrap="square" lIns="36576" tIns="18288" rIns="36576" bIns="18288" anchor="t">
             <a:spAutoFit/>
           </a:bodyPr>
           <a:lstStyle/>
@@ -10741,6 +10634,7 @@
           <a:lstStyle/>
           <a:p>
             <a:pPr algn="ctr"/>
+            <a:endParaRPr/>
           </a:p>
         </p:txBody>
       </p:sp>
@@ -10841,6 +10735,7 @@
           <a:lstStyle/>
           <a:p>
             <a:pPr algn="ctr"/>
+            <a:endParaRPr/>
           </a:p>
         </p:txBody>
       </p:sp>
@@ -10984,7 +10879,7 @@
           <a:noFill/>
         </p:spPr>
         <p:txBody>
-          <a:bodyPr wrap="square" lIns="36576" rIns="36576" tIns="18288" bIns="18288" anchor="t">
+          <a:bodyPr wrap="square" lIns="36576" tIns="18288" rIns="36576" bIns="18288" anchor="t">
             <a:spAutoFit/>
           </a:bodyPr>
           <a:lstStyle/>
@@ -11046,6 +10941,7 @@
           <a:lstStyle/>
           <a:p>
             <a:pPr algn="ctr"/>
+            <a:endParaRPr/>
           </a:p>
         </p:txBody>
       </p:sp>
@@ -11161,6 +11057,7 @@
           <a:lstStyle/>
           <a:p>
             <a:pPr algn="ctr"/>
+            <a:endParaRPr/>
           </a:p>
         </p:txBody>
       </p:sp>
@@ -11181,7 +11078,7 @@
           <a:noFill/>
         </p:spPr>
         <p:txBody>
-          <a:bodyPr wrap="square" lIns="36576" rIns="36576" tIns="18288" bIns="18288" anchor="t">
+          <a:bodyPr wrap="square" lIns="36576" tIns="18288" rIns="36576" bIns="18288" anchor="t">
             <a:spAutoFit/>
           </a:bodyPr>
           <a:lstStyle/>
@@ -11278,6 +11175,7 @@
           <a:lstStyle/>
           <a:p>
             <a:pPr algn="ctr"/>
+            <a:endParaRPr/>
           </a:p>
         </p:txBody>
       </p:sp>
@@ -11393,6 +11291,7 @@
           <a:lstStyle/>
           <a:p>
             <a:pPr algn="ctr"/>
+            <a:endParaRPr/>
           </a:p>
         </p:txBody>
       </p:sp>
@@ -11413,7 +11312,7 @@
           <a:noFill/>
         </p:spPr>
         <p:txBody>
-          <a:bodyPr wrap="square" lIns="36576" rIns="36576" tIns="18288" bIns="18288" anchor="t">
+          <a:bodyPr wrap="square" lIns="36576" tIns="18288" rIns="36576" bIns="18288" anchor="t">
             <a:spAutoFit/>
           </a:bodyPr>
           <a:lstStyle/>
@@ -11510,6 +11409,7 @@
           <a:lstStyle/>
           <a:p>
             <a:pPr algn="ctr"/>
+            <a:endParaRPr/>
           </a:p>
         </p:txBody>
       </p:sp>
@@ -11625,6 +11525,7 @@
           <a:lstStyle/>
           <a:p>
             <a:pPr algn="ctr"/>
+            <a:endParaRPr/>
           </a:p>
         </p:txBody>
       </p:sp>
@@ -11645,7 +11546,7 @@
           <a:noFill/>
         </p:spPr>
         <p:txBody>
-          <a:bodyPr wrap="square" lIns="36576" rIns="36576" tIns="18288" bIns="18288" anchor="t">
+          <a:bodyPr wrap="square" lIns="36576" tIns="18288" rIns="36576" bIns="18288" anchor="t">
             <a:spAutoFit/>
           </a:bodyPr>
           <a:lstStyle/>
@@ -11707,6 +11608,7 @@
           <a:lstStyle/>
           <a:p>
             <a:pPr algn="ctr"/>
+            <a:endParaRPr/>
           </a:p>
         </p:txBody>
       </p:sp>
@@ -11727,7 +11629,7 @@
           <a:noFill/>
         </p:spPr>
         <p:txBody>
-          <a:bodyPr wrap="square" lIns="36576" rIns="36576" tIns="18288" bIns="18288" anchor="t">
+          <a:bodyPr wrap="square" lIns="36576" tIns="18288" rIns="36576" bIns="18288" anchor="t">
             <a:spAutoFit/>
           </a:bodyPr>
           <a:lstStyle/>
@@ -11762,7 +11664,7 @@
           <a:noFill/>
         </p:spPr>
         <p:txBody>
-          <a:bodyPr wrap="square" lIns="36576" rIns="36576" tIns="18288" bIns="18288" anchor="t">
+          <a:bodyPr wrap="square" lIns="36576" tIns="18288" rIns="36576" bIns="18288" anchor="t">
             <a:spAutoFit/>
           </a:bodyPr>
           <a:lstStyle/>
@@ -11859,6 +11761,7 @@
           <a:lstStyle/>
           <a:p>
             <a:pPr algn="ctr"/>
+            <a:endParaRPr/>
           </a:p>
         </p:txBody>
       </p:sp>
@@ -11879,7 +11782,7 @@
           <a:noFill/>
         </p:spPr>
         <p:txBody>
-          <a:bodyPr wrap="square" lIns="36576" rIns="36576" tIns="18288" bIns="18288" anchor="t">
+          <a:bodyPr wrap="square" lIns="36576" tIns="18288" rIns="36576" bIns="18288" anchor="t">
             <a:spAutoFit/>
           </a:bodyPr>
           <a:lstStyle/>
@@ -11937,6 +11840,7 @@
           <a:lstStyle/>
           <a:p>
             <a:pPr algn="ctr"/>
+            <a:endParaRPr/>
           </a:p>
         </p:txBody>
       </p:sp>
@@ -11957,7 +11861,7 @@
           <a:noFill/>
         </p:spPr>
         <p:txBody>
-          <a:bodyPr wrap="square" lIns="36576" rIns="36576" tIns="18288" bIns="18288" anchor="t">
+          <a:bodyPr wrap="square" lIns="36576" tIns="18288" rIns="36576" bIns="18288" anchor="t">
             <a:spAutoFit/>
           </a:bodyPr>
           <a:lstStyle/>
@@ -12017,6 +11921,7 @@
           <a:lstStyle/>
           <a:p>
             <a:pPr algn="ctr"/>
+            <a:endParaRPr/>
           </a:p>
         </p:txBody>
       </p:sp>
@@ -12062,6 +11967,7 @@
           <a:lstStyle/>
           <a:p>
             <a:pPr algn="ctr"/>
+            <a:endParaRPr/>
           </a:p>
         </p:txBody>
       </p:sp>
@@ -12082,7 +11988,7 @@
           <a:noFill/>
         </p:spPr>
         <p:txBody>
-          <a:bodyPr wrap="square" lIns="36576" rIns="36576" tIns="18288" bIns="18288" anchor="t">
+          <a:bodyPr wrap="square" lIns="36576" tIns="18288" rIns="36576" bIns="18288" anchor="t">
             <a:spAutoFit/>
           </a:bodyPr>
           <a:lstStyle/>
@@ -12094,6 +12000,7 @@
                 </a:solidFill>
               </a:defRPr>
             </a:pPr>
+            <a:endParaRPr/>
           </a:p>
         </p:txBody>
       </p:sp>
@@ -12114,7 +12021,7 @@
           <a:noFill/>
         </p:spPr>
         <p:txBody>
-          <a:bodyPr wrap="square" lIns="36576" rIns="36576" tIns="18288" bIns="18288" anchor="t">
+          <a:bodyPr wrap="square" lIns="36576" tIns="18288" rIns="36576" bIns="18288" anchor="t">
             <a:spAutoFit/>
           </a:bodyPr>
           <a:lstStyle/>
@@ -12149,7 +12056,7 @@
           <a:noFill/>
         </p:spPr>
         <p:txBody>
-          <a:bodyPr wrap="square" lIns="36576" rIns="36576" tIns="18288" bIns="18288" anchor="t">
+          <a:bodyPr wrap="square" lIns="36576" tIns="18288" rIns="36576" bIns="18288" anchor="t">
             <a:spAutoFit/>
           </a:bodyPr>
           <a:lstStyle/>
@@ -12209,6 +12116,7 @@
           <a:lstStyle/>
           <a:p>
             <a:pPr algn="ctr"/>
+            <a:endParaRPr/>
           </a:p>
         </p:txBody>
       </p:sp>
@@ -12229,7 +12137,7 @@
           <a:noFill/>
         </p:spPr>
         <p:txBody>
-          <a:bodyPr wrap="square" lIns="36576" rIns="36576" tIns="18288" bIns="18288" anchor="t">
+          <a:bodyPr wrap="square" lIns="36576" tIns="18288" rIns="36576" bIns="18288" anchor="t">
             <a:spAutoFit/>
           </a:bodyPr>
           <a:lstStyle/>
@@ -12264,7 +12172,7 @@
           <a:noFill/>
         </p:spPr>
         <p:txBody>
-          <a:bodyPr wrap="square" lIns="36576" rIns="36576" tIns="18288" bIns="18288" anchor="t">
+          <a:bodyPr wrap="square" lIns="36576" tIns="18288" rIns="36576" bIns="18288" anchor="t">
             <a:spAutoFit/>
           </a:bodyPr>
           <a:lstStyle/>
@@ -12299,7 +12207,7 @@
           <a:noFill/>
         </p:spPr>
         <p:txBody>
-          <a:bodyPr wrap="square" lIns="36576" rIns="36576" tIns="18288" bIns="18288" anchor="t">
+          <a:bodyPr wrap="square" lIns="36576" tIns="18288" rIns="36576" bIns="18288" anchor="t">
             <a:spAutoFit/>
           </a:bodyPr>
           <a:lstStyle/>
@@ -12429,6 +12337,7 @@
           <a:lstStyle/>
           <a:p>
             <a:pPr algn="ctr"/>
+            <a:endParaRPr/>
           </a:p>
         </p:txBody>
       </p:sp>
@@ -12449,7 +12358,7 @@
           <a:noFill/>
         </p:spPr>
         <p:txBody>
-          <a:bodyPr wrap="square" lIns="36576" rIns="36576" tIns="18288" bIns="18288" anchor="t">
+          <a:bodyPr wrap="square" lIns="36576" tIns="18288" rIns="36576" bIns="18288" anchor="t">
             <a:spAutoFit/>
           </a:bodyPr>
           <a:lstStyle/>
@@ -12484,7 +12393,7 @@
           <a:noFill/>
         </p:spPr>
         <p:txBody>
-          <a:bodyPr wrap="square" lIns="36576" rIns="36576" tIns="18288" bIns="18288" anchor="t">
+          <a:bodyPr wrap="square" lIns="36576" tIns="18288" rIns="36576" bIns="18288" anchor="t">
             <a:spAutoFit/>
           </a:bodyPr>
           <a:lstStyle/>
@@ -12519,7 +12428,7 @@
           <a:noFill/>
         </p:spPr>
         <p:txBody>
-          <a:bodyPr wrap="square" lIns="36576" rIns="36576" tIns="18288" bIns="18288" anchor="t">
+          <a:bodyPr wrap="square" lIns="36576" tIns="18288" rIns="36576" bIns="18288" anchor="t">
             <a:spAutoFit/>
           </a:bodyPr>
           <a:lstStyle/>
@@ -12649,6 +12558,7 @@
           <a:lstStyle/>
           <a:p>
             <a:pPr algn="ctr"/>
+            <a:endParaRPr/>
           </a:p>
         </p:txBody>
       </p:sp>
@@ -12669,7 +12579,7 @@
           <a:noFill/>
         </p:spPr>
         <p:txBody>
-          <a:bodyPr wrap="square" lIns="36576" rIns="36576" tIns="18288" bIns="18288" anchor="t">
+          <a:bodyPr wrap="square" lIns="36576" tIns="18288" rIns="36576" bIns="18288" anchor="t">
             <a:spAutoFit/>
           </a:bodyPr>
           <a:lstStyle/>
@@ -12704,7 +12614,7 @@
           <a:noFill/>
         </p:spPr>
         <p:txBody>
-          <a:bodyPr wrap="square" lIns="36576" rIns="36576" tIns="18288" bIns="18288" anchor="t">
+          <a:bodyPr wrap="square" lIns="36576" tIns="18288" rIns="36576" bIns="18288" anchor="t">
             <a:spAutoFit/>
           </a:bodyPr>
           <a:lstStyle/>
@@ -12739,7 +12649,7 @@
           <a:noFill/>
         </p:spPr>
         <p:txBody>
-          <a:bodyPr wrap="square" lIns="36576" rIns="36576" tIns="18288" bIns="18288" anchor="t">
+          <a:bodyPr wrap="square" lIns="36576" tIns="18288" rIns="36576" bIns="18288" anchor="t">
             <a:spAutoFit/>
           </a:bodyPr>
           <a:lstStyle/>
@@ -12869,6 +12779,7 @@
           <a:lstStyle/>
           <a:p>
             <a:pPr algn="ctr"/>
+            <a:endParaRPr/>
           </a:p>
         </p:txBody>
       </p:sp>
@@ -12889,7 +12800,7 @@
           <a:noFill/>
         </p:spPr>
         <p:txBody>
-          <a:bodyPr wrap="square" lIns="36576" rIns="36576" tIns="18288" bIns="18288" anchor="t">
+          <a:bodyPr wrap="square" lIns="36576" tIns="18288" rIns="36576" bIns="18288" anchor="t">
             <a:spAutoFit/>
           </a:bodyPr>
           <a:lstStyle/>
@@ -12924,7 +12835,7 @@
           <a:noFill/>
         </p:spPr>
         <p:txBody>
-          <a:bodyPr wrap="square" lIns="36576" rIns="36576" tIns="18288" bIns="18288" anchor="t">
+          <a:bodyPr wrap="square" lIns="36576" tIns="18288" rIns="36576" bIns="18288" anchor="t">
             <a:spAutoFit/>
           </a:bodyPr>
           <a:lstStyle/>
@@ -12959,7 +12870,7 @@
           <a:noFill/>
         </p:spPr>
         <p:txBody>
-          <a:bodyPr wrap="square" lIns="36576" rIns="36576" tIns="18288" bIns="18288" anchor="t">
+          <a:bodyPr wrap="square" lIns="36576" tIns="18288" rIns="36576" bIns="18288" anchor="t">
             <a:spAutoFit/>
           </a:bodyPr>
           <a:lstStyle/>
@@ -13089,6 +13000,7 @@
           <a:lstStyle/>
           <a:p>
             <a:pPr algn="ctr"/>
+            <a:endParaRPr/>
           </a:p>
         </p:txBody>
       </p:sp>
@@ -13109,7 +13021,7 @@
           <a:noFill/>
         </p:spPr>
         <p:txBody>
-          <a:bodyPr wrap="square" lIns="36576" rIns="36576" tIns="18288" bIns="18288" anchor="t">
+          <a:bodyPr wrap="square" lIns="36576" tIns="18288" rIns="36576" bIns="18288" anchor="t">
             <a:spAutoFit/>
           </a:bodyPr>
           <a:lstStyle/>
@@ -13144,7 +13056,7 @@
           <a:noFill/>
         </p:spPr>
         <p:txBody>
-          <a:bodyPr wrap="square" lIns="36576" rIns="36576" tIns="18288" bIns="18288" anchor="t">
+          <a:bodyPr wrap="square" lIns="36576" tIns="18288" rIns="36576" bIns="18288" anchor="t">
             <a:spAutoFit/>
           </a:bodyPr>
           <a:lstStyle/>
@@ -13179,7 +13091,7 @@
           <a:noFill/>
         </p:spPr>
         <p:txBody>
-          <a:bodyPr wrap="square" lIns="36576" rIns="36576" tIns="18288" bIns="18288" anchor="t">
+          <a:bodyPr wrap="square" lIns="36576" tIns="18288" rIns="36576" bIns="18288" anchor="t">
             <a:spAutoFit/>
           </a:bodyPr>
           <a:lstStyle/>
@@ -13309,6 +13221,7 @@
           <a:lstStyle/>
           <a:p>
             <a:pPr algn="ctr"/>
+            <a:endParaRPr/>
           </a:p>
         </p:txBody>
       </p:sp>
@@ -13329,7 +13242,7 @@
           <a:noFill/>
         </p:spPr>
         <p:txBody>
-          <a:bodyPr wrap="square" lIns="36576" rIns="36576" tIns="18288" bIns="18288" anchor="t">
+          <a:bodyPr wrap="square" lIns="36576" tIns="18288" rIns="36576" bIns="18288" anchor="t">
             <a:spAutoFit/>
           </a:bodyPr>
           <a:lstStyle/>
@@ -13364,7 +13277,7 @@
           <a:noFill/>
         </p:spPr>
         <p:txBody>
-          <a:bodyPr wrap="square" lIns="36576" rIns="36576" tIns="18288" bIns="18288" anchor="t">
+          <a:bodyPr wrap="square" lIns="36576" tIns="18288" rIns="36576" bIns="18288" anchor="t">
             <a:spAutoFit/>
           </a:bodyPr>
           <a:lstStyle/>
@@ -13399,7 +13312,7 @@
           <a:noFill/>
         </p:spPr>
         <p:txBody>
-          <a:bodyPr wrap="square" lIns="36576" rIns="36576" tIns="18288" bIns="18288" anchor="t">
+          <a:bodyPr wrap="square" lIns="36576" tIns="18288" rIns="36576" bIns="18288" anchor="t">
             <a:spAutoFit/>
           </a:bodyPr>
           <a:lstStyle/>
@@ -13529,6 +13442,7 @@
           <a:lstStyle/>
           <a:p>
             <a:pPr algn="ctr"/>
+            <a:endParaRPr/>
           </a:p>
         </p:txBody>
       </p:sp>
@@ -13549,7 +13463,7 @@
           <a:noFill/>
         </p:spPr>
         <p:txBody>
-          <a:bodyPr wrap="square" lIns="36576" rIns="36576" tIns="18288" bIns="18288" anchor="t">
+          <a:bodyPr wrap="square" lIns="36576" tIns="18288" rIns="36576" bIns="18288" anchor="t">
             <a:spAutoFit/>
           </a:bodyPr>
           <a:lstStyle/>
@@ -13584,7 +13498,7 @@
           <a:noFill/>
         </p:spPr>
         <p:txBody>
-          <a:bodyPr wrap="square" lIns="36576" rIns="36576" tIns="18288" bIns="18288" anchor="t">
+          <a:bodyPr wrap="square" lIns="36576" tIns="18288" rIns="36576" bIns="18288" anchor="t">
             <a:spAutoFit/>
           </a:bodyPr>
           <a:lstStyle/>
@@ -13619,7 +13533,7 @@
           <a:noFill/>
         </p:spPr>
         <p:txBody>
-          <a:bodyPr wrap="square" lIns="36576" rIns="36576" tIns="18288" bIns="18288" anchor="t">
+          <a:bodyPr wrap="square" lIns="36576" tIns="18288" rIns="36576" bIns="18288" anchor="t">
             <a:spAutoFit/>
           </a:bodyPr>
           <a:lstStyle/>
@@ -13749,6 +13663,7 @@
           <a:lstStyle/>
           <a:p>
             <a:pPr algn="ctr"/>
+            <a:endParaRPr/>
           </a:p>
         </p:txBody>
       </p:sp>
@@ -13769,7 +13684,7 @@
           <a:noFill/>
         </p:spPr>
         <p:txBody>
-          <a:bodyPr wrap="square" lIns="36576" rIns="36576" tIns="18288" bIns="18288" anchor="t">
+          <a:bodyPr wrap="square" lIns="36576" tIns="18288" rIns="36576" bIns="18288" anchor="t">
             <a:spAutoFit/>
           </a:bodyPr>
           <a:lstStyle/>
@@ -13804,7 +13719,7 @@
           <a:noFill/>
         </p:spPr>
         <p:txBody>
-          <a:bodyPr wrap="square" lIns="36576" rIns="36576" tIns="18288" bIns="18288" anchor="t">
+          <a:bodyPr wrap="square" lIns="36576" tIns="18288" rIns="36576" bIns="18288" anchor="t">
             <a:spAutoFit/>
           </a:bodyPr>
           <a:lstStyle/>
@@ -13839,7 +13754,7 @@
           <a:noFill/>
         </p:spPr>
         <p:txBody>
-          <a:bodyPr wrap="square" lIns="36576" rIns="36576" tIns="18288" bIns="18288" anchor="t">
+          <a:bodyPr wrap="square" lIns="36576" tIns="18288" rIns="36576" bIns="18288" anchor="t">
             <a:spAutoFit/>
           </a:bodyPr>
           <a:lstStyle/>
@@ -13969,6 +13884,7 @@
           <a:lstStyle/>
           <a:p>
             <a:pPr algn="ctr"/>
+            <a:endParaRPr/>
           </a:p>
         </p:txBody>
       </p:sp>
@@ -13989,7 +13905,7 @@
           <a:noFill/>
         </p:spPr>
         <p:txBody>
-          <a:bodyPr wrap="square" lIns="36576" rIns="36576" tIns="18288" bIns="18288" anchor="t">
+          <a:bodyPr wrap="square" lIns="36576" tIns="18288" rIns="36576" bIns="18288" anchor="t">
             <a:spAutoFit/>
           </a:bodyPr>
           <a:lstStyle/>
@@ -14024,7 +13940,7 @@
           <a:noFill/>
         </p:spPr>
         <p:txBody>
-          <a:bodyPr wrap="square" lIns="36576" rIns="36576" tIns="18288" bIns="18288" anchor="t">
+          <a:bodyPr wrap="square" lIns="36576" tIns="18288" rIns="36576" bIns="18288" anchor="t">
             <a:spAutoFit/>
           </a:bodyPr>
           <a:lstStyle/>
@@ -14059,7 +13975,7 @@
           <a:noFill/>
         </p:spPr>
         <p:txBody>
-          <a:bodyPr wrap="square" lIns="36576" rIns="36576" tIns="18288" bIns="18288" anchor="t">
+          <a:bodyPr wrap="square" lIns="36576" tIns="18288" rIns="36576" bIns="18288" anchor="t">
             <a:spAutoFit/>
           </a:bodyPr>
           <a:lstStyle/>
@@ -14189,6 +14105,7 @@
           <a:lstStyle/>
           <a:p>
             <a:pPr algn="ctr"/>
+            <a:endParaRPr/>
           </a:p>
         </p:txBody>
       </p:sp>
@@ -14209,7 +14126,7 @@
           <a:noFill/>
         </p:spPr>
         <p:txBody>
-          <a:bodyPr wrap="square" lIns="36576" rIns="36576" tIns="18288" bIns="18288" anchor="t">
+          <a:bodyPr wrap="square" lIns="36576" tIns="18288" rIns="36576" bIns="18288" anchor="t">
             <a:spAutoFit/>
           </a:bodyPr>
           <a:lstStyle/>
@@ -14244,7 +14161,7 @@
           <a:noFill/>
         </p:spPr>
         <p:txBody>
-          <a:bodyPr wrap="square" lIns="36576" rIns="36576" tIns="18288" bIns="18288" anchor="t">
+          <a:bodyPr wrap="square" lIns="36576" tIns="18288" rIns="36576" bIns="18288" anchor="t">
             <a:spAutoFit/>
           </a:bodyPr>
           <a:lstStyle/>
@@ -14279,7 +14196,7 @@
           <a:noFill/>
         </p:spPr>
         <p:txBody>
-          <a:bodyPr wrap="square" lIns="36576" rIns="36576" tIns="18288" bIns="18288" anchor="t">
+          <a:bodyPr wrap="square" lIns="36576" tIns="18288" rIns="36576" bIns="18288" anchor="t">
             <a:spAutoFit/>
           </a:bodyPr>
           <a:lstStyle/>
@@ -14409,6 +14326,7 @@
           <a:lstStyle/>
           <a:p>
             <a:pPr algn="ctr"/>
+            <a:endParaRPr/>
           </a:p>
         </p:txBody>
       </p:sp>
@@ -14429,7 +14347,7 @@
           <a:noFill/>
         </p:spPr>
         <p:txBody>
-          <a:bodyPr wrap="square" lIns="36576" rIns="36576" tIns="18288" bIns="18288" anchor="t">
+          <a:bodyPr wrap="square" lIns="36576" tIns="18288" rIns="36576" bIns="18288" anchor="t">
             <a:spAutoFit/>
           </a:bodyPr>
           <a:lstStyle/>
@@ -14464,7 +14382,7 @@
           <a:noFill/>
         </p:spPr>
         <p:txBody>
-          <a:bodyPr wrap="square" lIns="36576" rIns="36576" tIns="18288" bIns="18288" anchor="t">
+          <a:bodyPr wrap="square" lIns="36576" tIns="18288" rIns="36576" bIns="18288" anchor="t">
             <a:spAutoFit/>
           </a:bodyPr>
           <a:lstStyle/>
@@ -14499,7 +14417,7 @@
           <a:noFill/>
         </p:spPr>
         <p:txBody>
-          <a:bodyPr wrap="square" lIns="36576" rIns="36576" tIns="18288" bIns="18288" anchor="t">
+          <a:bodyPr wrap="square" lIns="36576" tIns="18288" rIns="36576" bIns="18288" anchor="t">
             <a:spAutoFit/>
           </a:bodyPr>
           <a:lstStyle/>
@@ -14666,6 +14584,7 @@
           <a:lstStyle/>
           <a:p>
             <a:pPr algn="ctr"/>
+            <a:endParaRPr/>
           </a:p>
         </p:txBody>
       </p:sp>
@@ -15061,44 +14980,44 @@
         <a:sysClr val="window" lastClr="FFFFFF"/>
       </a:lt1>
       <a:dk2>
-        <a:srgbClr val="1F497D"/>
+        <a:srgbClr val="44546A"/>
       </a:dk2>
       <a:lt2>
-        <a:srgbClr val="EEECE1"/>
+        <a:srgbClr val="E7E6E6"/>
       </a:lt2>
       <a:accent1>
-        <a:srgbClr val="4F81BD"/>
+        <a:srgbClr val="4472C4"/>
       </a:accent1>
       <a:accent2>
-        <a:srgbClr val="C0504D"/>
+        <a:srgbClr val="ED7D31"/>
       </a:accent2>
       <a:accent3>
-        <a:srgbClr val="9BBB59"/>
+        <a:srgbClr val="A5A5A5"/>
       </a:accent3>
       <a:accent4>
-        <a:srgbClr val="8064A2"/>
+        <a:srgbClr val="FFC000"/>
       </a:accent4>
       <a:accent5>
-        <a:srgbClr val="4BACC6"/>
+        <a:srgbClr val="5B9BD5"/>
       </a:accent5>
       <a:accent6>
-        <a:srgbClr val="F79646"/>
+        <a:srgbClr val="70AD47"/>
       </a:accent6>
       <a:hlink>
-        <a:srgbClr val="0000FF"/>
+        <a:srgbClr val="0563C1"/>
       </a:hlink>
       <a:folHlink>
-        <a:srgbClr val="800080"/>
+        <a:srgbClr val="954F72"/>
       </a:folHlink>
     </a:clrScheme>
     <a:fontScheme name="Office">
       <a:majorFont>
-        <a:latin typeface="Calibri"/>
+        <a:latin typeface="Calibri Light" panose="020F0302020204030204"/>
         <a:ea typeface=""/>
         <a:cs typeface=""/>
-        <a:font script="Jpan" typeface="ＭＳ Ｐゴシック"/>
+        <a:font script="Jpan" typeface="游ゴシック Light"/>
         <a:font script="Hang" typeface="맑은 고딕"/>
-        <a:font script="Hans" typeface="宋体"/>
+        <a:font script="Hans" typeface="等线 Light"/>
         <a:font script="Hant" typeface="新細明體"/>
         <a:font script="Arab" typeface="Times New Roman"/>
         <a:font script="Hebr" typeface="Times New Roman"/>
@@ -15126,14 +15045,31 @@
         <a:font script="Viet" typeface="Times New Roman"/>
         <a:font script="Uigh" typeface="Microsoft Uighur"/>
         <a:font script="Geor" typeface="Sylfaen"/>
+        <a:font script="Armn" typeface="Arial"/>
+        <a:font script="Bugi" typeface="Leelawadee UI"/>
+        <a:font script="Bopo" typeface="Microsoft JhengHei"/>
+        <a:font script="Java" typeface="Javanese Text"/>
+        <a:font script="Lisu" typeface="Segoe UI"/>
+        <a:font script="Mymr" typeface="Myanmar Text"/>
+        <a:font script="Nkoo" typeface="Ebrima"/>
+        <a:font script="Olck" typeface="Nirmala UI"/>
+        <a:font script="Osma" typeface="Ebrima"/>
+        <a:font script="Phag" typeface="Phagspa"/>
+        <a:font script="Syrn" typeface="Estrangelo Edessa"/>
+        <a:font script="Syrj" typeface="Estrangelo Edessa"/>
+        <a:font script="Syre" typeface="Estrangelo Edessa"/>
+        <a:font script="Sora" typeface="Nirmala UI"/>
+        <a:font script="Tale" typeface="Microsoft Tai Le"/>
+        <a:font script="Talu" typeface="Microsoft New Tai Lue"/>
+        <a:font script="Tfng" typeface="Ebrima"/>
       </a:majorFont>
       <a:minorFont>
-        <a:latin typeface="Calibri"/>
+        <a:latin typeface="Calibri" panose="020F0502020204030204"/>
         <a:ea typeface=""/>
         <a:cs typeface=""/>
-        <a:font script="Jpan" typeface="ＭＳ Ｐゴシック"/>
+        <a:font script="Jpan" typeface="游ゴシック"/>
         <a:font script="Hang" typeface="맑은 고딕"/>
-        <a:font script="Hans" typeface="宋体"/>
+        <a:font script="Hans" typeface="等线"/>
         <a:font script="Hant" typeface="新細明體"/>
         <a:font script="Arab" typeface="Arial"/>
         <a:font script="Hebr" typeface="Arial"/>
@@ -15161,6 +15097,23 @@
         <a:font script="Viet" typeface="Arial"/>
         <a:font script="Uigh" typeface="Microsoft Uighur"/>
         <a:font script="Geor" typeface="Sylfaen"/>
+        <a:font script="Armn" typeface="Arial"/>
+        <a:font script="Bugi" typeface="Leelawadee UI"/>
+        <a:font script="Bopo" typeface="Microsoft JhengHei"/>
+        <a:font script="Java" typeface="Javanese Text"/>
+        <a:font script="Lisu" typeface="Segoe UI"/>
+        <a:font script="Mymr" typeface="Myanmar Text"/>
+        <a:font script="Nkoo" typeface="Ebrima"/>
+        <a:font script="Olck" typeface="Nirmala UI"/>
+        <a:font script="Osma" typeface="Ebrima"/>
+        <a:font script="Phag" typeface="Phagspa"/>
+        <a:font script="Syrn" typeface="Estrangelo Edessa"/>
+        <a:font script="Syrj" typeface="Estrangelo Edessa"/>
+        <a:font script="Syre" typeface="Estrangelo Edessa"/>
+        <a:font script="Sora" typeface="Nirmala UI"/>
+        <a:font script="Tale" typeface="Microsoft Tai Le"/>
+        <a:font script="Talu" typeface="Microsoft New Tai Lue"/>
+        <a:font script="Tfng" typeface="Ebrima"/>
       </a:minorFont>
     </a:fontScheme>
     <a:fmtScheme name="Office">
@@ -15172,200 +15125,141 @@
           <a:gsLst>
             <a:gs pos="0">
               <a:schemeClr val="phClr">
-                <a:tint val="50000"/>
-                <a:satMod val="300000"/>
+                <a:lumMod val="110000"/>
+                <a:satMod val="105000"/>
+                <a:tint val="67000"/>
               </a:schemeClr>
             </a:gs>
-            <a:gs pos="35000">
+            <a:gs pos="50000">
               <a:schemeClr val="phClr">
-                <a:tint val="37000"/>
-                <a:satMod val="300000"/>
+                <a:lumMod val="105000"/>
+                <a:satMod val="103000"/>
+                <a:tint val="73000"/>
               </a:schemeClr>
             </a:gs>
             <a:gs pos="100000">
               <a:schemeClr val="phClr">
-                <a:tint val="15000"/>
-                <a:satMod val="350000"/>
+                <a:lumMod val="105000"/>
+                <a:satMod val="109000"/>
+                <a:tint val="81000"/>
               </a:schemeClr>
             </a:gs>
           </a:gsLst>
-          <a:lin ang="16200000" scaled="1"/>
+          <a:lin ang="5400000" scaled="0"/>
         </a:gradFill>
         <a:gradFill rotWithShape="1">
           <a:gsLst>
             <a:gs pos="0">
               <a:schemeClr val="phClr">
-                <a:tint val="100000"/>
+                <a:satMod val="103000"/>
+                <a:lumMod val="102000"/>
+                <a:tint val="94000"/>
+              </a:schemeClr>
+            </a:gs>
+            <a:gs pos="50000">
+              <a:schemeClr val="phClr">
+                <a:satMod val="110000"/>
+                <a:lumMod val="100000"/>
                 <a:shade val="100000"/>
-                <a:satMod val="130000"/>
               </a:schemeClr>
             </a:gs>
             <a:gs pos="100000">
               <a:schemeClr val="phClr">
-                <a:tint val="50000"/>
-                <a:shade val="100000"/>
-                <a:satMod val="350000"/>
+                <a:lumMod val="99000"/>
+                <a:satMod val="120000"/>
+                <a:shade val="78000"/>
               </a:schemeClr>
             </a:gs>
           </a:gsLst>
-          <a:lin ang="16200000" scaled="0"/>
+          <a:lin ang="5400000" scaled="0"/>
         </a:gradFill>
       </a:fillStyleLst>
       <a:lnStyleLst>
-        <a:ln w="9525" cap="flat" cmpd="sng" algn="ctr">
-          <a:solidFill>
-            <a:schemeClr val="phClr">
-              <a:shade val="95000"/>
-              <a:satMod val="105000"/>
-            </a:schemeClr>
-          </a:solidFill>
-          <a:prstDash val="solid"/>
-        </a:ln>
-        <a:ln w="25400" cap="flat" cmpd="sng" algn="ctr">
+        <a:ln w="6350" cap="flat" cmpd="sng" algn="ctr">
           <a:solidFill>
             <a:schemeClr val="phClr"/>
           </a:solidFill>
           <a:prstDash val="solid"/>
+          <a:miter lim="800000"/>
         </a:ln>
-        <a:ln w="38100" cap="flat" cmpd="sng" algn="ctr">
+        <a:ln w="12700" cap="flat" cmpd="sng" algn="ctr">
           <a:solidFill>
             <a:schemeClr val="phClr"/>
           </a:solidFill>
           <a:prstDash val="solid"/>
+          <a:miter lim="800000"/>
+        </a:ln>
+        <a:ln w="19050" cap="flat" cmpd="sng" algn="ctr">
+          <a:solidFill>
+            <a:schemeClr val="phClr"/>
+          </a:solidFill>
+          <a:prstDash val="solid"/>
+          <a:miter lim="800000"/>
         </a:ln>
       </a:lnStyleLst>
       <a:effectStyleLst>
         <a:effectStyle>
+          <a:effectLst/>
+        </a:effectStyle>
+        <a:effectStyle>
+          <a:effectLst/>
+        </a:effectStyle>
+        <a:effectStyle>
           <a:effectLst>
-            <a:outerShdw blurRad="40000" dist="20000" dir="5400000" rotWithShape="0">
+            <a:outerShdw blurRad="57150" dist="19050" dir="5400000" algn="ctr" rotWithShape="0">
               <a:srgbClr val="000000">
-                <a:alpha val="38000"/>
+                <a:alpha val="63000"/>
               </a:srgbClr>
             </a:outerShdw>
           </a:effectLst>
-        </a:effectStyle>
-        <a:effectStyle>
-          <a:effectLst>
-            <a:outerShdw blurRad="40000" dist="23000" dir="5400000" rotWithShape="0">
-              <a:srgbClr val="000000">
-                <a:alpha val="35000"/>
-              </a:srgbClr>
-            </a:outerShdw>
-          </a:effectLst>
-        </a:effectStyle>
-        <a:effectStyle>
-          <a:effectLst>
-            <a:outerShdw blurRad="40000" dist="23000" dir="5400000" rotWithShape="0">
-              <a:srgbClr val="000000">
-                <a:alpha val="35000"/>
-              </a:srgbClr>
-            </a:outerShdw>
-          </a:effectLst>
-          <a:scene3d>
-            <a:camera prst="orthographicFront">
-              <a:rot lat="0" lon="0" rev="0"/>
-            </a:camera>
-            <a:lightRig rig="threePt" dir="t">
-              <a:rot lat="0" lon="0" rev="1200000"/>
-            </a:lightRig>
-          </a:scene3d>
-          <a:sp3d>
-            <a:bevelT w="63500" h="25400"/>
-          </a:sp3d>
         </a:effectStyle>
       </a:effectStyleLst>
       <a:bgFillStyleLst>
         <a:solidFill>
           <a:schemeClr val="phClr"/>
         </a:solidFill>
+        <a:solidFill>
+          <a:schemeClr val="phClr">
+            <a:tint val="95000"/>
+            <a:satMod val="170000"/>
+          </a:schemeClr>
+        </a:solidFill>
         <a:gradFill rotWithShape="1">
           <a:gsLst>
             <a:gs pos="0">
               <a:schemeClr val="phClr">
-                <a:tint val="40000"/>
-                <a:satMod val="350000"/>
+                <a:tint val="93000"/>
+                <a:satMod val="150000"/>
+                <a:shade val="98000"/>
+                <a:lumMod val="102000"/>
               </a:schemeClr>
             </a:gs>
-            <a:gs pos="40000">
+            <a:gs pos="50000">
               <a:schemeClr val="phClr">
-                <a:tint val="45000"/>
-                <a:shade val="99000"/>
-                <a:satMod val="350000"/>
+                <a:tint val="98000"/>
+                <a:satMod val="130000"/>
+                <a:shade val="90000"/>
+                <a:lumMod val="103000"/>
               </a:schemeClr>
             </a:gs>
             <a:gs pos="100000">
               <a:schemeClr val="phClr">
-                <a:shade val="20000"/>
-                <a:satMod val="255000"/>
+                <a:shade val="63000"/>
+                <a:satMod val="120000"/>
               </a:schemeClr>
             </a:gs>
           </a:gsLst>
-          <a:path path="circle">
-            <a:fillToRect l="50000" t="-80000" r="50000" b="180000"/>
-          </a:path>
-        </a:gradFill>
-        <a:gradFill rotWithShape="1">
-          <a:gsLst>
-            <a:gs pos="0">
-              <a:schemeClr val="phClr">
-                <a:tint val="80000"/>
-                <a:satMod val="300000"/>
-              </a:schemeClr>
-            </a:gs>
-            <a:gs pos="100000">
-              <a:schemeClr val="phClr">
-                <a:shade val="30000"/>
-                <a:satMod val="200000"/>
-              </a:schemeClr>
-            </a:gs>
-          </a:gsLst>
-          <a:path path="circle">
-            <a:fillToRect l="50000" t="50000" r="50000" b="50000"/>
-          </a:path>
+          <a:lin ang="5400000" scaled="0"/>
         </a:gradFill>
       </a:bgFillStyleLst>
     </a:fmtScheme>
   </a:themeElements>
-  <a:objectDefaults>
-    <a:spDef>
-      <a:spPr/>
-      <a:bodyPr/>
-      <a:lstStyle/>
-      <a:style>
-        <a:lnRef idx="1">
-          <a:schemeClr val="accent1"/>
-        </a:lnRef>
-        <a:fillRef idx="3">
-          <a:schemeClr val="accent1"/>
-        </a:fillRef>
-        <a:effectRef idx="2">
-          <a:schemeClr val="accent1"/>
-        </a:effectRef>
-        <a:fontRef idx="minor">
-          <a:schemeClr val="lt1"/>
-        </a:fontRef>
-      </a:style>
-    </a:spDef>
-    <a:lnDef>
-      <a:spPr/>
-      <a:bodyPr/>
-      <a:lstStyle/>
-      <a:style>
-        <a:lnRef idx="2">
-          <a:schemeClr val="accent1"/>
-        </a:lnRef>
-        <a:fillRef idx="0">
-          <a:schemeClr val="accent1"/>
-        </a:fillRef>
-        <a:effectRef idx="1">
-          <a:schemeClr val="accent1"/>
-        </a:effectRef>
-        <a:fontRef idx="minor">
-          <a:schemeClr val="tx1"/>
-        </a:fontRef>
-      </a:style>
-    </a:lnDef>
-  </a:objectDefaults>
+  <a:objectDefaults/>
   <a:extraClrSchemeLst/>
+  <a:extLst>
+    <a:ext uri="{05A4C25C-085E-4340-85A3-A5531E510DB2}">
+      <thm15:themeFamily xmlns:thm15="http://schemas.microsoft.com/office/thememl/2012/main" name="Office Theme" id="{62F939B6-93AF-4DB8-9C6B-D6C7DFDC589F}" vid="{4A3C46E8-61CC-4603-A589-7422A47A8E4A}"/>
+    </a:ext>
+  </a:extLst>
 </a:theme>
 </file>